--- a/public/fun/pack/pptx/family/가족소개_24_나혼자·1인가구_절집풍경.pptx
+++ b/public/fun/pack/pptx/family/가족소개_24_나혼자·1인가구_절집풍경.pptx
@@ -3347,7 +3347,7 @@
             <a:r>
               <a:rPr sz="3600" b="1" i="0">
                 <a:solidFill>
-                  <a:srgbClr val="274649"/>
+                  <a:srgbClr val="11595F"/>
                 </a:solidFill>
               </a:rPr>
               <a:t>우리 가족을 소개합니다</a:t>
@@ -3385,7 +3385,7 @@
             <a:r>
               <a:rPr sz="1700" b="0" i="1">
                 <a:solidFill>
-                  <a:srgbClr val="274649"/>
+                  <a:srgbClr val="11595F"/>
                 </a:solidFill>
               </a:rPr>
               <a:t>혼자 올라간 절집 마당에서</a:t>
@@ -3445,7 +3445,7 @@
     <p:bg>
       <p:bgPr>
         <a:solidFill>
-          <a:srgbClr val="F2F7F8"/>
+          <a:srgbClr val="EEFBFC"/>
         </a:solidFill>
         <a:effectLst/>
       </p:bgPr>
@@ -3474,7 +3474,7 @@
           <a:noFill/>
           <a:ln w="28575">
             <a:solidFill>
-              <a:srgbClr val="4B868B"/>
+              <a:srgbClr val="26B8C5"/>
             </a:solidFill>
           </a:ln>
         </p:spPr>
@@ -3503,7 +3503,7 @@
           <a:noFill/>
           <a:ln w="9525">
             <a:solidFill>
-              <a:srgbClr val="D6E9EB"/>
+              <a:srgbClr val="D1F7FA"/>
             </a:solidFill>
           </a:ln>
         </p:spPr>
@@ -3545,7 +3545,7 @@
             <a:r>
               <a:rPr sz="3000" b="1" i="0">
                 <a:solidFill>
-                  <a:srgbClr val="274649"/>
+                  <a:srgbClr val="11595F"/>
                 </a:solidFill>
               </a:rPr>
               <a:t>가족 구성원</a:t>
@@ -3568,11 +3568,11 @@
             <a:avLst/>
           </a:prstGeom>
           <a:solidFill>
-            <a:srgbClr val="D6E9EB"/>
+            <a:srgbClr val="D1F7FA"/>
           </a:solidFill>
           <a:ln w="19050">
             <a:solidFill>
-              <a:srgbClr val="4B868B"/>
+              <a:srgbClr val="26B8C5"/>
             </a:solidFill>
             <a:prstDash val="dash"/>
           </a:ln>
@@ -3591,7 +3591,7 @@
             <a:r>
               <a:rPr sz="1200" b="0" i="0">
                 <a:solidFill>
-                  <a:srgbClr val="274649"/>
+                  <a:srgbClr val="11595F"/>
                 </a:solidFill>
               </a:rPr>
               <a:t>사진</a:t>
@@ -3629,7 +3629,7 @@
             <a:r>
               <a:rPr sz="1600" b="1" i="0">
                 <a:solidFill>
-                  <a:srgbClr val="274649"/>
+                  <a:srgbClr val="11595F"/>
                 </a:solidFill>
               </a:rPr>
               <a:t>나</a:t>
@@ -3720,11 +3720,11 @@
             <a:avLst/>
           </a:prstGeom>
           <a:solidFill>
-            <a:srgbClr val="D6E9EB"/>
+            <a:srgbClr val="D1F7FA"/>
           </a:solidFill>
           <a:ln w="19050">
             <a:solidFill>
-              <a:srgbClr val="4B868B"/>
+              <a:srgbClr val="26B8C5"/>
             </a:solidFill>
             <a:prstDash val="dash"/>
           </a:ln>
@@ -3743,7 +3743,7 @@
             <a:r>
               <a:rPr sz="1200" b="0" i="0">
                 <a:solidFill>
-                  <a:srgbClr val="274649"/>
+                  <a:srgbClr val="11595F"/>
                 </a:solidFill>
               </a:rPr>
               <a:t>사진</a:t>
@@ -3781,7 +3781,7 @@
             <a:r>
               <a:rPr sz="1600" b="1" i="0">
                 <a:solidFill>
-                  <a:srgbClr val="274649"/>
+                  <a:srgbClr val="11595F"/>
                 </a:solidFill>
               </a:rPr>
               <a:t>내 공간</a:t>
@@ -3872,11 +3872,11 @@
             <a:avLst/>
           </a:prstGeom>
           <a:solidFill>
-            <a:srgbClr val="D6E9EB"/>
+            <a:srgbClr val="D1F7FA"/>
           </a:solidFill>
           <a:ln w="19050">
             <a:solidFill>
-              <a:srgbClr val="4B868B"/>
+              <a:srgbClr val="26B8C5"/>
             </a:solidFill>
             <a:prstDash val="dash"/>
           </a:ln>
@@ -3895,7 +3895,7 @@
             <a:r>
               <a:rPr sz="1200" b="0" i="0">
                 <a:solidFill>
-                  <a:srgbClr val="274649"/>
+                  <a:srgbClr val="11595F"/>
                 </a:solidFill>
               </a:rPr>
               <a:t>사진</a:t>
@@ -3933,7 +3933,7 @@
             <a:r>
               <a:rPr sz="1600" b="1" i="0">
                 <a:solidFill>
-                  <a:srgbClr val="274649"/>
+                  <a:srgbClr val="11595F"/>
                 </a:solidFill>
               </a:rPr>
               <a:t>내 하루</a:t>
@@ -4023,7 +4023,7 @@
     <p:bg>
       <p:bgPr>
         <a:solidFill>
-          <a:srgbClr val="F2F7F8"/>
+          <a:srgbClr val="EEFBFC"/>
         </a:solidFill>
         <a:effectLst/>
       </p:bgPr>
@@ -4052,7 +4052,7 @@
           <a:noFill/>
           <a:ln w="28575">
             <a:solidFill>
-              <a:srgbClr val="4B868B"/>
+              <a:srgbClr val="26B8C5"/>
             </a:solidFill>
           </a:ln>
         </p:spPr>
@@ -4081,7 +4081,7 @@
           <a:noFill/>
           <a:ln w="9525">
             <a:solidFill>
-              <a:srgbClr val="D6E9EB"/>
+              <a:srgbClr val="D1F7FA"/>
             </a:solidFill>
           </a:ln>
         </p:spPr>
@@ -4123,7 +4123,7 @@
             <a:r>
               <a:rPr sz="3000" b="1" i="0">
                 <a:solidFill>
-                  <a:srgbClr val="274649"/>
+                  <a:srgbClr val="11595F"/>
                 </a:solidFill>
               </a:rPr>
               <a:t>우리 가족 이야기</a:t>
@@ -4146,7 +4146,7 @@
             <a:avLst/>
           </a:prstGeom>
           <a:solidFill>
-            <a:srgbClr val="D6E9EB"/>
+            <a:srgbClr val="D1F7FA"/>
           </a:solidFill>
           <a:ln>
             <a:noFill/>
@@ -4175,7 +4175,7 @@
             <a:avLst/>
           </a:prstGeom>
           <a:solidFill>
-            <a:srgbClr val="4B868B"/>
+            <a:srgbClr val="26B8C5"/>
           </a:solidFill>
           <a:ln w="38100">
             <a:solidFill>
@@ -4221,7 +4221,7 @@
             <a:r>
               <a:rPr sz="1600" b="1" i="0">
                 <a:solidFill>
-                  <a:srgbClr val="4B868B"/>
+                  <a:srgbClr val="26B8C5"/>
                 </a:solidFill>
               </a:rPr>
               <a:t>태어난 곳</a:t>
@@ -4259,7 +4259,7 @@
             <a:r>
               <a:rPr sz="1800" b="1" i="0">
                 <a:solidFill>
-                  <a:srgbClr val="274649"/>
+                  <a:srgbClr val="11595F"/>
                 </a:solidFill>
               </a:rPr>
               <a:t>나의 뿌리</a:t>
@@ -4320,7 +4320,7 @@
             <a:avLst/>
           </a:prstGeom>
           <a:solidFill>
-            <a:srgbClr val="4B868B"/>
+            <a:srgbClr val="26B8C5"/>
           </a:solidFill>
           <a:ln w="38100">
             <a:solidFill>
@@ -4366,7 +4366,7 @@
             <a:r>
               <a:rPr sz="1600" b="1" i="0">
                 <a:solidFill>
-                  <a:srgbClr val="4B868B"/>
+                  <a:srgbClr val="26B8C5"/>
                 </a:solidFill>
               </a:rPr>
               <a:t>학창 시절</a:t>
@@ -4404,7 +4404,7 @@
             <a:r>
               <a:rPr sz="1800" b="1" i="0">
                 <a:solidFill>
-                  <a:srgbClr val="274649"/>
+                  <a:srgbClr val="11595F"/>
                 </a:solidFill>
               </a:rPr>
               <a:t>자라던 시간</a:t>
@@ -4465,7 +4465,7 @@
             <a:avLst/>
           </a:prstGeom>
           <a:solidFill>
-            <a:srgbClr val="4B868B"/>
+            <a:srgbClr val="26B8C5"/>
           </a:solidFill>
           <a:ln w="38100">
             <a:solidFill>
@@ -4511,7 +4511,7 @@
             <a:r>
               <a:rPr sz="1600" b="1" i="0">
                 <a:solidFill>
-                  <a:srgbClr val="4B868B"/>
+                  <a:srgbClr val="26B8C5"/>
                 </a:solidFill>
               </a:rPr>
               <a:t>혼자 시작한 날</a:t>
@@ -4549,7 +4549,7 @@
             <a:r>
               <a:rPr sz="1800" b="1" i="0">
                 <a:solidFill>
-                  <a:srgbClr val="274649"/>
+                  <a:srgbClr val="11595F"/>
                 </a:solidFill>
               </a:rPr>
               <a:t>나의 첫 집</a:t>
@@ -4610,7 +4610,7 @@
             <a:avLst/>
           </a:prstGeom>
           <a:solidFill>
-            <a:srgbClr val="4B868B"/>
+            <a:srgbClr val="26B8C5"/>
           </a:solidFill>
           <a:ln w="38100">
             <a:solidFill>
@@ -4656,7 +4656,7 @@
             <a:r>
               <a:rPr sz="1600" b="1" i="0">
                 <a:solidFill>
-                  <a:srgbClr val="4B868B"/>
+                  <a:srgbClr val="26B8C5"/>
                 </a:solidFill>
               </a:rPr>
               <a:t>지금</a:t>
@@ -4694,7 +4694,7 @@
             <a:r>
               <a:rPr sz="1800" b="1" i="0">
                 <a:solidFill>
-                  <a:srgbClr val="274649"/>
+                  <a:srgbClr val="11595F"/>
                 </a:solidFill>
               </a:rPr>
               <a:t>오늘의 나</a:t>
@@ -4754,7 +4754,7 @@
     <p:bg>
       <p:bgPr>
         <a:solidFill>
-          <a:srgbClr val="F2F7F8"/>
+          <a:srgbClr val="EEFBFC"/>
         </a:solidFill>
         <a:effectLst/>
       </p:bgPr>
@@ -4783,7 +4783,7 @@
           <a:noFill/>
           <a:ln w="28575">
             <a:solidFill>
-              <a:srgbClr val="4B868B"/>
+              <a:srgbClr val="26B8C5"/>
             </a:solidFill>
           </a:ln>
         </p:spPr>
@@ -4812,7 +4812,7 @@
           <a:noFill/>
           <a:ln w="9525">
             <a:solidFill>
-              <a:srgbClr val="D6E9EB"/>
+              <a:srgbClr val="D1F7FA"/>
             </a:solidFill>
           </a:ln>
         </p:spPr>
@@ -4854,7 +4854,7 @@
             <a:r>
               <a:rPr sz="3000" b="1" i="0">
                 <a:solidFill>
-                  <a:srgbClr val="274649"/>
+                  <a:srgbClr val="11595F"/>
                 </a:solidFill>
               </a:rPr>
               <a:t>우리 가족의 약속</a:t>
@@ -4879,11 +4879,11 @@
             </a:avLst>
           </a:prstGeom>
           <a:solidFill>
-            <a:srgbClr val="F2F7F8"/>
+            <a:srgbClr val="EEFBFC"/>
           </a:solidFill>
           <a:ln w="12700">
             <a:solidFill>
-              <a:srgbClr val="D6E9EB"/>
+              <a:srgbClr val="D1F7FA"/>
             </a:solidFill>
           </a:ln>
         </p:spPr>
@@ -4910,7 +4910,7 @@
             <a:avLst/>
           </a:prstGeom>
           <a:solidFill>
-            <a:srgbClr val="4B868B"/>
+            <a:srgbClr val="26B8C5"/>
           </a:solidFill>
           <a:ln>
             <a:noFill/>
@@ -4968,7 +4968,7 @@
             <a:r>
               <a:rPr sz="1800" b="1" i="0">
                 <a:solidFill>
-                  <a:srgbClr val="274649"/>
+                  <a:srgbClr val="11595F"/>
                 </a:solidFill>
               </a:rPr>
               <a:t>약속 1</a:t>
@@ -5031,11 +5031,11 @@
             </a:avLst>
           </a:prstGeom>
           <a:solidFill>
-            <a:srgbClr val="F2F7F8"/>
+            <a:srgbClr val="EEFBFC"/>
           </a:solidFill>
           <a:ln w="12700">
             <a:solidFill>
-              <a:srgbClr val="D6E9EB"/>
+              <a:srgbClr val="D1F7FA"/>
             </a:solidFill>
           </a:ln>
         </p:spPr>
@@ -5062,7 +5062,7 @@
             <a:avLst/>
           </a:prstGeom>
           <a:solidFill>
-            <a:srgbClr val="4B868B"/>
+            <a:srgbClr val="26B8C5"/>
           </a:solidFill>
           <a:ln>
             <a:noFill/>
@@ -5120,7 +5120,7 @@
             <a:r>
               <a:rPr sz="1800" b="1" i="0">
                 <a:solidFill>
-                  <a:srgbClr val="274649"/>
+                  <a:srgbClr val="11595F"/>
                 </a:solidFill>
               </a:rPr>
               <a:t>약속 2</a:t>
@@ -5183,11 +5183,11 @@
             </a:avLst>
           </a:prstGeom>
           <a:solidFill>
-            <a:srgbClr val="F2F7F8"/>
+            <a:srgbClr val="EEFBFC"/>
           </a:solidFill>
           <a:ln w="12700">
             <a:solidFill>
-              <a:srgbClr val="D6E9EB"/>
+              <a:srgbClr val="D1F7FA"/>
             </a:solidFill>
           </a:ln>
         </p:spPr>
@@ -5214,7 +5214,7 @@
             <a:avLst/>
           </a:prstGeom>
           <a:solidFill>
-            <a:srgbClr val="4B868B"/>
+            <a:srgbClr val="26B8C5"/>
           </a:solidFill>
           <a:ln>
             <a:noFill/>
@@ -5272,7 +5272,7 @@
             <a:r>
               <a:rPr sz="1800" b="1" i="0">
                 <a:solidFill>
-                  <a:srgbClr val="274649"/>
+                  <a:srgbClr val="11595F"/>
                 </a:solidFill>
               </a:rPr>
               <a:t>약속 3</a:t>
@@ -5332,7 +5332,7 @@
     <p:bg>
       <p:bgPr>
         <a:solidFill>
-          <a:srgbClr val="F2F7F8"/>
+          <a:srgbClr val="EEFBFC"/>
         </a:solidFill>
         <a:effectLst/>
       </p:bgPr>
@@ -5361,7 +5361,7 @@
           <a:noFill/>
           <a:ln w="28575">
             <a:solidFill>
-              <a:srgbClr val="4B868B"/>
+              <a:srgbClr val="26B8C5"/>
             </a:solidFill>
           </a:ln>
         </p:spPr>
@@ -5390,7 +5390,7 @@
           <a:noFill/>
           <a:ln w="9525">
             <a:solidFill>
-              <a:srgbClr val="D6E9EB"/>
+              <a:srgbClr val="D1F7FA"/>
             </a:solidFill>
           </a:ln>
         </p:spPr>
@@ -5432,7 +5432,7 @@
             <a:r>
               <a:rPr sz="3000" b="1" i="0">
                 <a:solidFill>
-                  <a:srgbClr val="274649"/>
+                  <a:srgbClr val="11595F"/>
                 </a:solidFill>
               </a:rPr>
               <a:t>가족 사진</a:t>
@@ -5457,11 +5457,11 @@
             </a:avLst>
           </a:prstGeom>
           <a:solidFill>
-            <a:srgbClr val="D6E9EB"/>
+            <a:srgbClr val="D1F7FA"/>
           </a:solidFill>
           <a:ln w="19050">
             <a:solidFill>
-              <a:srgbClr val="4B868B"/>
+              <a:srgbClr val="26B8C5"/>
             </a:solidFill>
             <a:prstDash val="dash"/>
           </a:ln>
@@ -5480,7 +5480,7 @@
             <a:r>
               <a:rPr sz="1200" b="0" i="0">
                 <a:solidFill>
-                  <a:srgbClr val="274649"/>
+                  <a:srgbClr val="11595F"/>
                 </a:solidFill>
               </a:rPr>
               <a:t>사진 1</a:t>
@@ -5505,11 +5505,11 @@
             </a:avLst>
           </a:prstGeom>
           <a:solidFill>
-            <a:srgbClr val="D6E9EB"/>
+            <a:srgbClr val="D1F7FA"/>
           </a:solidFill>
           <a:ln w="19050">
             <a:solidFill>
-              <a:srgbClr val="4B868B"/>
+              <a:srgbClr val="26B8C5"/>
             </a:solidFill>
             <a:prstDash val="dash"/>
           </a:ln>
@@ -5528,7 +5528,7 @@
             <a:r>
               <a:rPr sz="1200" b="0" i="0">
                 <a:solidFill>
-                  <a:srgbClr val="274649"/>
+                  <a:srgbClr val="11595F"/>
                 </a:solidFill>
               </a:rPr>
               <a:t>사진 2</a:t>
@@ -5553,11 +5553,11 @@
             </a:avLst>
           </a:prstGeom>
           <a:solidFill>
-            <a:srgbClr val="D6E9EB"/>
+            <a:srgbClr val="D1F7FA"/>
           </a:solidFill>
           <a:ln w="19050">
             <a:solidFill>
-              <a:srgbClr val="4B868B"/>
+              <a:srgbClr val="26B8C5"/>
             </a:solidFill>
             <a:prstDash val="dash"/>
           </a:ln>
@@ -5576,7 +5576,7 @@
             <a:r>
               <a:rPr sz="1200" b="0" i="0">
                 <a:solidFill>
-                  <a:srgbClr val="274649"/>
+                  <a:srgbClr val="11595F"/>
                 </a:solidFill>
               </a:rPr>
               <a:t>사진 3</a:t>
@@ -5601,11 +5601,11 @@
             </a:avLst>
           </a:prstGeom>
           <a:solidFill>
-            <a:srgbClr val="D6E9EB"/>
+            <a:srgbClr val="D1F7FA"/>
           </a:solidFill>
           <a:ln w="19050">
             <a:solidFill>
-              <a:srgbClr val="4B868B"/>
+              <a:srgbClr val="26B8C5"/>
             </a:solidFill>
             <a:prstDash val="dash"/>
           </a:ln>
@@ -5624,7 +5624,7 @@
             <a:r>
               <a:rPr sz="1200" b="0" i="0">
                 <a:solidFill>
-                  <a:srgbClr val="274649"/>
+                  <a:srgbClr val="11595F"/>
                 </a:solidFill>
               </a:rPr>
               <a:t>사진 4</a:t>
@@ -5649,11 +5649,11 @@
             </a:avLst>
           </a:prstGeom>
           <a:solidFill>
-            <a:srgbClr val="D6E9EB"/>
+            <a:srgbClr val="D1F7FA"/>
           </a:solidFill>
           <a:ln w="19050">
             <a:solidFill>
-              <a:srgbClr val="4B868B"/>
+              <a:srgbClr val="26B8C5"/>
             </a:solidFill>
             <a:prstDash val="dash"/>
           </a:ln>
@@ -5672,7 +5672,7 @@
             <a:r>
               <a:rPr sz="1200" b="0" i="0">
                 <a:solidFill>
-                  <a:srgbClr val="274649"/>
+                  <a:srgbClr val="11595F"/>
                 </a:solidFill>
               </a:rPr>
               <a:t>사진 5</a:t>
@@ -5697,11 +5697,11 @@
             </a:avLst>
           </a:prstGeom>
           <a:solidFill>
-            <a:srgbClr val="D6E9EB"/>
+            <a:srgbClr val="D1F7FA"/>
           </a:solidFill>
           <a:ln w="19050">
             <a:solidFill>
-              <a:srgbClr val="4B868B"/>
+              <a:srgbClr val="26B8C5"/>
             </a:solidFill>
             <a:prstDash val="dash"/>
           </a:ln>
@@ -5720,7 +5720,7 @@
             <a:r>
               <a:rPr sz="1200" b="0" i="0">
                 <a:solidFill>
-                  <a:srgbClr val="274649"/>
+                  <a:srgbClr val="11595F"/>
                 </a:solidFill>
               </a:rPr>
               <a:t>사진 6</a:t>
@@ -5800,7 +5800,7 @@
             <a:r>
               <a:rPr sz="3600" b="1" i="0">
                 <a:solidFill>
-                  <a:srgbClr val="274649"/>
+                  <a:srgbClr val="11595F"/>
                 </a:solidFill>
               </a:rPr>
               <a:t>우리 가족 소개를 마칩니다</a:t>
@@ -5838,7 +5838,7 @@
             <a:r>
               <a:rPr sz="1700" b="0" i="1">
                 <a:solidFill>
-                  <a:srgbClr val="274649"/>
+                  <a:srgbClr val="11595F"/>
                 </a:solidFill>
               </a:rPr>
               <a:t>읽어 주셔서 고맙습니다</a:t>
@@ -5903,34 +5903,34 @@
         <a:sysClr val="window" lastClr="FFFFFF"/>
       </a:lt1>
       <a:dk2>
-        <a:srgbClr val="274649"/>
+        <a:srgbClr val="11595F"/>
       </a:dk2>
       <a:lt2>
-        <a:srgbClr val="F2F7F8"/>
+        <a:srgbClr val="EEFBFC"/>
       </a:lt2>
       <a:accent1>
-        <a:srgbClr val="4B868B"/>
+        <a:srgbClr val="26B8C5"/>
       </a:accent1>
       <a:accent2>
-        <a:srgbClr val="854761"/>
+        <a:srgbClr val="209DB6"/>
       </a:accent2>
       <a:accent3>
-        <a:srgbClr val="274649"/>
+        <a:srgbClr val="11595F"/>
       </a:accent3>
       <a:accent4>
-        <a:srgbClr val="D6E9EB"/>
+        <a:srgbClr val="D1F7FA"/>
       </a:accent4>
       <a:accent5>
-        <a:srgbClr val="686676"/>
+        <a:srgbClr val="23AABE"/>
       </a:accent5>
       <a:accent6>
-        <a:srgbClr val="7D9092"/>
+        <a:srgbClr val="709B9F"/>
       </a:accent6>
       <a:hlink>
-        <a:srgbClr val="4B868B"/>
+        <a:srgbClr val="26B8C5"/>
       </a:hlink>
       <a:folHlink>
-        <a:srgbClr val="274649"/>
+        <a:srgbClr val="11595F"/>
       </a:folHlink>
     </a:clrScheme>
     <a:fontScheme name="Office">

--- a/public/fun/pack/pptx/family/가족소개_24_나혼자·1인가구_절집풍경.pptx
+++ b/public/fun/pack/pptx/family/가족소개_24_나혼자·1인가구_절집풍경.pptx
@@ -3286,6 +3286,14 @@
 <file path=ppt/slides/slide1.xml><?xml version="1.0" encoding="utf-8"?>
 <p:sld xmlns:a="http://schemas.openxmlformats.org/drawingml/2006/main" xmlns:p="http://schemas.openxmlformats.org/presentationml/2006/main" xmlns:r="http://schemas.openxmlformats.org/officeDocument/2006/relationships">
   <p:cSld>
+    <p:bg>
+      <p:bgPr>
+        <a:solidFill>
+          <a:srgbClr val="EAFBFD"/>
+        </a:solidFill>
+        <a:effectLst/>
+      </p:bgPr>
+    </p:bg>
     <p:spTree>
       <p:nvGrpSpPr>
         <p:cNvPr id="1" name=""/>
@@ -3293,30 +3301,116 @@
         <p:nvPr/>
       </p:nvGrpSpPr>
       <p:grpSpPr/>
-      <p:pic>
-        <p:nvPicPr>
-          <p:cNvPr id="3" name="표지 그림" descr="family-24.jpg"/>
-          <p:cNvPicPr>
-            <a:picLocks noChangeAspect="1"/>
-          </p:cNvPicPr>
+      <p:sp>
+        <p:nvSpPr>
+          <p:cNvPr id="3" name="사진 자리"/>
+          <p:cNvSpPr/>
           <p:nvPr/>
-        </p:nvPicPr>
-        <p:blipFill>
-          <a:blip r:embed="rId2"/>
-          <a:stretch>
-            <a:fillRect/>
-          </a:stretch>
-        </p:blipFill>
+        </p:nvSpPr>
         <p:spPr>
           <a:xfrm>
             <a:off x="0" y="0"/>
-            <a:ext cx="12191695" cy="6858000"/>
+            <a:ext cx="4389010" cy="6858000"/>
           </a:xfrm>
           <a:prstGeom prst="rect">
             <a:avLst/>
           </a:prstGeom>
-        </p:spPr>
-      </p:pic>
+          <a:solidFill>
+            <a:srgbClr val="A5EDF3"/>
+          </a:solidFill>
+          <a:ln>
+            <a:noFill/>
+          </a:ln>
+        </p:spPr>
+        <p:txBody>
+          <a:bodyPr rtlCol="0" anchor="ctr" wrap="square" lIns="54864" rIns="54864" tIns="27432" bIns="27432">
+            <a:noAutofit/>
+          </a:bodyPr>
+          <a:lstStyle/>
+          <a:p>
+            <a:pPr algn="ctr">
+              <a:lnSpc>
+                <a:spcPct val="100000"/>
+              </a:lnSpc>
+            </a:pPr>
+            <a:r>
+              <a:rPr sz="1400" b="0" i="0">
+                <a:solidFill>
+                  <a:srgbClr val="274649"/>
+                </a:solidFill>
+              </a:rPr>
+              <a:t>사진을 넣어 주세요</a:t>
+            </a:r>
+          </a:p>
+        </p:txBody>
+      </p:sp>
+      <p:sp>
+        <p:nvSpPr>
+          <p:cNvPr id="4" name="장식"/>
+          <p:cNvSpPr/>
+          <p:nvPr/>
+        </p:nvSpPr>
+        <p:spPr>
+          <a:xfrm>
+            <a:off x="365750" y="365760"/>
+            <a:ext cx="3657508" cy="6126480"/>
+          </a:xfrm>
+          <a:prstGeom prst="rect">
+            <a:avLst/>
+          </a:prstGeom>
+          <a:noFill/>
+          <a:ln w="9525">
+            <a:solidFill>
+              <a:srgbClr val="26231F"/>
+            </a:solidFill>
+          </a:ln>
+        </p:spPr>
+        <p:txBody>
+          <a:bodyPr rtlCol="0" anchor="ctr"/>
+          <a:lstStyle/>
+          <a:p>
+            <a:pPr algn="ctr"/>
+          </a:p>
+        </p:txBody>
+      </p:sp>
+      <p:sp>
+        <p:nvSpPr>
+          <p:cNvPr id="5" name="라벨"/>
+          <p:cNvSpPr txBox="1"/>
+          <p:nvPr/>
+        </p:nvSpPr>
+        <p:spPr>
+          <a:xfrm>
+            <a:off x="6827349" y="2148840"/>
+            <a:ext cx="4632844" cy="274320"/>
+          </a:xfrm>
+          <a:prstGeom prst="rect">
+            <a:avLst/>
+          </a:prstGeom>
+          <a:noFill/>
+        </p:spPr>
+        <p:txBody>
+          <a:bodyPr wrap="square" lIns="54864" rIns="54864" tIns="27432" bIns="27432" anchor="t">
+            <a:noAutofit/>
+          </a:bodyPr>
+          <a:lstStyle/>
+          <a:p>
+            <a:pPr algn="l">
+              <a:lnSpc>
+                <a:spcPct val="115000"/>
+              </a:lnSpc>
+            </a:pPr>
+            <a:r>
+              <a:rPr sz="1000" b="1" i="0" spc="250">
+                <a:solidFill>
+                  <a:srgbClr val="26231F"/>
+                </a:solidFill>
+              </a:rPr>
+              <a:t>FAMILY ALBUM</a:t>
+            </a:r>
+          </a:p>
+        </p:txBody>
+      </p:sp>
       <p:sp>
         <p:nvSpPr>
           <p:cNvPr id="2" name="Title 1"/>
@@ -3329,8 +3423,8 @@
         </p:nvSpPr>
         <p:spPr>
           <a:xfrm>
-            <a:off x="853418" y="2057400"/>
-            <a:ext cx="6095847" cy="1554480"/>
+            <a:off x="6827349" y="2606040"/>
+            <a:ext cx="4632844" cy="1188720"/>
           </a:xfrm>
         </p:spPr>
         <p:txBody>
@@ -3345,9 +3439,9 @@
               </a:lnSpc>
             </a:pPr>
             <a:r>
-              <a:rPr sz="3600" b="1" i="0">
-                <a:solidFill>
-                  <a:srgbClr val="11595F"/>
+              <a:rPr sz="4000" b="1" i="0">
+                <a:solidFill>
+                  <a:srgbClr val="26231F"/>
                 </a:solidFill>
               </a:rPr>
               <a:t>우리 가족을 소개합니다</a:t>
@@ -3357,14 +3451,14 @@
       </p:sp>
       <p:sp>
         <p:nvSpPr>
-          <p:cNvPr id="4" name="한 줄 문구"/>
+          <p:cNvPr id="6" name="한 줄 문구"/>
           <p:cNvSpPr txBox="1"/>
           <p:nvPr/>
         </p:nvSpPr>
         <p:spPr>
           <a:xfrm>
-            <a:off x="853418" y="3749039"/>
-            <a:ext cx="6095847" cy="822960"/>
+            <a:off x="6827349" y="3886200"/>
+            <a:ext cx="4632844" cy="822960"/>
           </a:xfrm>
           <a:prstGeom prst="rect">
             <a:avLst/>
@@ -3383,9 +3477,9 @@
               </a:lnSpc>
             </a:pPr>
             <a:r>
-              <a:rPr sz="1700" b="0" i="1">
-                <a:solidFill>
-                  <a:srgbClr val="11595F"/>
+              <a:rPr sz="1700" b="0" i="0">
+                <a:solidFill>
+                  <a:srgbClr val="26231F"/>
                 </a:solidFill>
               </a:rPr>
               <a:t>혼자 올라간 절집 마당에서</a:t>
@@ -3395,14 +3489,14 @@
       </p:sp>
       <p:sp>
         <p:nvSpPr>
-          <p:cNvPr id="5" name="안내 문구"/>
+          <p:cNvPr id="7" name="안내 문구"/>
           <p:cNvSpPr txBox="1"/>
           <p:nvPr/>
         </p:nvSpPr>
         <p:spPr>
           <a:xfrm>
-            <a:off x="853418" y="4617720"/>
-            <a:ext cx="6095847" cy="914400"/>
+            <a:off x="6827349" y="4754880"/>
+            <a:ext cx="4632844" cy="914400"/>
           </a:xfrm>
           <a:prstGeom prst="rect">
             <a:avLst/>
@@ -3423,10 +3517,10 @@
             <a:r>
               <a:rPr sz="1400" b="0" i="0">
                 <a:solidFill>
-                  <a:srgbClr val="666666"/>
+                  <a:srgbClr val="26231F"/>
                 </a:solidFill>
               </a:rPr>
-              <a:t>나 혼자 · 1인 가구 · 2027. 00. 00</a:t>
+              <a:t>나 혼자 · 1인 가구 · 날짜 입력</a:t>
             </a:r>
           </a:p>
         </p:txBody>
@@ -3445,7 +3539,7 @@
     <p:bg>
       <p:bgPr>
         <a:solidFill>
-          <a:srgbClr val="EEFBFC"/>
+          <a:srgbClr val="D1F7FA"/>
         </a:solidFill>
         <a:effectLst/>
       </p:bgPr>
@@ -3465,46 +3559,86 @@
         </p:nvSpPr>
         <p:spPr>
           <a:xfrm>
-            <a:off x="256032" y="256032"/>
-            <a:ext cx="11679631" cy="6345936"/>
+            <a:off x="640080" y="566928"/>
+            <a:ext cx="64008" cy="868680"/>
+          </a:xfrm>
+          <a:prstGeom prst="roundRect">
+            <a:avLst>
+              <a:gd name="adj" fmla="val 50000"/>
+            </a:avLst>
+          </a:prstGeom>
+          <a:solidFill>
+            <a:srgbClr val="7BE0EA"/>
+          </a:solidFill>
+          <a:ln>
+            <a:noFill/>
+          </a:ln>
+        </p:spPr>
+        <p:txBody>
+          <a:bodyPr rtlCol="0" anchor="ctr"/>
+          <a:lstStyle/>
+          <a:p>
+            <a:pPr algn="ctr"/>
+          </a:p>
+        </p:txBody>
+      </p:sp>
+      <p:sp>
+        <p:nvSpPr>
+          <p:cNvPr id="4" name="상단 라벨"/>
+          <p:cNvSpPr txBox="1"/>
+          <p:nvPr/>
+        </p:nvSpPr>
+        <p:spPr>
+          <a:xfrm>
+            <a:off x="868680" y="274320"/>
+            <a:ext cx="5486400" cy="274320"/>
           </a:xfrm>
           <a:prstGeom prst="rect">
             <a:avLst/>
           </a:prstGeom>
           <a:noFill/>
-          <a:ln w="28575">
-            <a:solidFill>
-              <a:srgbClr val="26B8C5"/>
-            </a:solidFill>
-          </a:ln>
-        </p:spPr>
-        <p:txBody>
-          <a:bodyPr rtlCol="0" anchor="ctr"/>
-          <a:lstStyle/>
-          <a:p>
-            <a:pPr algn="ctr"/>
-          </a:p>
-        </p:txBody>
-      </p:sp>
-      <p:sp>
-        <p:nvSpPr>
-          <p:cNvPr id="4" name="장식"/>
+        </p:spPr>
+        <p:txBody>
+          <a:bodyPr wrap="square" lIns="54864" rIns="54864" tIns="27432" bIns="27432" anchor="ctr">
+            <a:noAutofit/>
+          </a:bodyPr>
+          <a:lstStyle/>
+          <a:p>
+            <a:pPr algn="l">
+              <a:lnSpc>
+                <a:spcPct val="115000"/>
+              </a:lnSpc>
+            </a:pPr>
+            <a:r>
+              <a:rPr sz="900" b="1" i="0" spc="250">
+                <a:solidFill>
+                  <a:srgbClr val="8E8780"/>
+                </a:solidFill>
+              </a:rPr>
+              <a:t>FAMILY ALBUM</a:t>
+            </a:r>
+          </a:p>
+        </p:txBody>
+      </p:sp>
+      <p:sp>
+        <p:nvSpPr>
+          <p:cNvPr id="5" name="포인트"/>
           <p:cNvSpPr/>
           <p:nvPr/>
         </p:nvSpPr>
         <p:spPr>
           <a:xfrm>
-            <a:off x="384048" y="384048"/>
-            <a:ext cx="11423599" cy="6089904"/>
-          </a:xfrm>
-          <a:prstGeom prst="rect">
+            <a:off x="11167567" y="667512"/>
+            <a:ext cx="310896" cy="310896"/>
+          </a:xfrm>
+          <a:prstGeom prst="mathPlus">
             <a:avLst/>
           </a:prstGeom>
-          <a:noFill/>
-          <a:ln w="9525">
-            <a:solidFill>
-              <a:srgbClr val="D1F7FA"/>
-            </a:solidFill>
+          <a:solidFill>
+            <a:srgbClr val="A5EDF3"/>
+          </a:solidFill>
+          <a:ln>
+            <a:noFill/>
           </a:ln>
         </p:spPr>
         <p:txBody>
@@ -3527,8 +3661,8 @@
         </p:nvSpPr>
         <p:spPr>
           <a:xfrm>
-            <a:off x="822960" y="548640"/>
-            <a:ext cx="9265615" cy="822960"/>
+            <a:off x="868680" y="566928"/>
+            <a:ext cx="9448495" cy="868680"/>
           </a:xfrm>
         </p:spPr>
         <p:txBody>
@@ -3545,7 +3679,7 @@
             <a:r>
               <a:rPr sz="3000" b="1" i="0">
                 <a:solidFill>
-                  <a:srgbClr val="11595F"/>
+                  <a:srgbClr val="26231F"/>
                 </a:solidFill>
               </a:rPr>
               <a:t>가족 구성원</a:t>
@@ -3555,14 +3689,14 @@
       </p:sp>
       <p:sp>
         <p:nvSpPr>
-          <p:cNvPr id="5" name="사진 자리"/>
+          <p:cNvPr id="6" name="사진 자리"/>
           <p:cNvSpPr/>
           <p:nvPr/>
         </p:nvSpPr>
         <p:spPr>
           <a:xfrm>
-            <a:off x="1349959" y="1554480"/>
-            <a:ext cx="2308860" cy="2308860"/>
+            <a:off x="1239469" y="1783080"/>
+            <a:ext cx="2286000" cy="2286000"/>
           </a:xfrm>
           <a:prstGeom prst="ellipse">
             <a:avLst/>
@@ -3571,9 +3705,7 @@
             <a:srgbClr val="D1F7FA"/>
           </a:solidFill>
           <a:ln w="19050">
-            <a:solidFill>
-              <a:srgbClr val="26B8C5"/>
-            </a:solidFill>
+            <a:noFill/>
             <a:prstDash val="dash"/>
           </a:ln>
         </p:spPr>
@@ -3591,7 +3723,7 @@
             <a:r>
               <a:rPr sz="1200" b="0" i="0">
                 <a:solidFill>
-                  <a:srgbClr val="11595F"/>
+                  <a:srgbClr val="8E8780"/>
                 </a:solidFill>
               </a:rPr>
               <a:t>사진</a:t>
@@ -3601,14 +3733,14 @@
       </p:sp>
       <p:sp>
         <p:nvSpPr>
-          <p:cNvPr id="6" name="TextBox 5"/>
+          <p:cNvPr id="7" name="TextBox 6"/>
           <p:cNvSpPr txBox="1"/>
           <p:nvPr/>
         </p:nvSpPr>
         <p:spPr>
           <a:xfrm>
-            <a:off x="822960" y="3954779"/>
-            <a:ext cx="3362858" cy="411480"/>
+            <a:off x="640080" y="4160520"/>
+            <a:ext cx="3484778" cy="411480"/>
           </a:xfrm>
           <a:prstGeom prst="rect">
             <a:avLst/>
@@ -3629,7 +3761,7 @@
             <a:r>
               <a:rPr sz="1600" b="1" i="0">
                 <a:solidFill>
-                  <a:srgbClr val="11595F"/>
+                  <a:srgbClr val="274649"/>
                 </a:solidFill>
               </a:rPr>
               <a:t>나</a:t>
@@ -3639,14 +3771,14 @@
       </p:sp>
       <p:sp>
         <p:nvSpPr>
-          <p:cNvPr id="7" name="TextBox 6"/>
+          <p:cNvPr id="8" name="TextBox 7"/>
           <p:cNvSpPr txBox="1"/>
           <p:nvPr/>
         </p:nvSpPr>
         <p:spPr>
           <a:xfrm>
-            <a:off x="914400" y="4411979"/>
-            <a:ext cx="3179978" cy="1760219"/>
+            <a:off x="731519" y="4617720"/>
+            <a:ext cx="3301898" cy="1737360"/>
           </a:xfrm>
           <a:prstGeom prst="rect">
             <a:avLst/>
@@ -3707,14 +3839,14 @@
       </p:sp>
       <p:sp>
         <p:nvSpPr>
-          <p:cNvPr id="8" name="사진 자리"/>
+          <p:cNvPr id="9" name="사진 자리"/>
           <p:cNvSpPr/>
           <p:nvPr/>
         </p:nvSpPr>
         <p:spPr>
           <a:xfrm>
-            <a:off x="4941417" y="1554480"/>
-            <a:ext cx="2308860" cy="2308860"/>
+            <a:off x="4952847" y="1783080"/>
+            <a:ext cx="2286000" cy="2286000"/>
           </a:xfrm>
           <a:prstGeom prst="ellipse">
             <a:avLst/>
@@ -3723,9 +3855,7 @@
             <a:srgbClr val="D1F7FA"/>
           </a:solidFill>
           <a:ln w="19050">
-            <a:solidFill>
-              <a:srgbClr val="26B8C5"/>
-            </a:solidFill>
+            <a:noFill/>
             <a:prstDash val="dash"/>
           </a:ln>
         </p:spPr>
@@ -3743,7 +3873,7 @@
             <a:r>
               <a:rPr sz="1200" b="0" i="0">
                 <a:solidFill>
-                  <a:srgbClr val="11595F"/>
+                  <a:srgbClr val="8E8780"/>
                 </a:solidFill>
               </a:rPr>
               <a:t>사진</a:t>
@@ -3753,14 +3883,14 @@
       </p:sp>
       <p:sp>
         <p:nvSpPr>
-          <p:cNvPr id="9" name="TextBox 8"/>
+          <p:cNvPr id="10" name="TextBox 9"/>
           <p:cNvSpPr txBox="1"/>
           <p:nvPr/>
         </p:nvSpPr>
         <p:spPr>
           <a:xfrm>
-            <a:off x="4414418" y="3954779"/>
-            <a:ext cx="3362858" cy="411480"/>
+            <a:off x="4353458" y="4160520"/>
+            <a:ext cx="3484778" cy="411480"/>
           </a:xfrm>
           <a:prstGeom prst="rect">
             <a:avLst/>
@@ -3781,7 +3911,7 @@
             <a:r>
               <a:rPr sz="1600" b="1" i="0">
                 <a:solidFill>
-                  <a:srgbClr val="11595F"/>
+                  <a:srgbClr val="274649"/>
                 </a:solidFill>
               </a:rPr>
               <a:t>내 공간</a:t>
@@ -3791,14 +3921,14 @@
       </p:sp>
       <p:sp>
         <p:nvSpPr>
-          <p:cNvPr id="10" name="TextBox 9"/>
+          <p:cNvPr id="11" name="TextBox 10"/>
           <p:cNvSpPr txBox="1"/>
           <p:nvPr/>
         </p:nvSpPr>
         <p:spPr>
           <a:xfrm>
-            <a:off x="4505858" y="4411979"/>
-            <a:ext cx="3179978" cy="1760219"/>
+            <a:off x="4444898" y="4617720"/>
+            <a:ext cx="3301898" cy="1737360"/>
           </a:xfrm>
           <a:prstGeom prst="rect">
             <a:avLst/>
@@ -3859,14 +3989,14 @@
       </p:sp>
       <p:sp>
         <p:nvSpPr>
-          <p:cNvPr id="11" name="사진 자리"/>
+          <p:cNvPr id="12" name="사진 자리"/>
           <p:cNvSpPr/>
           <p:nvPr/>
         </p:nvSpPr>
         <p:spPr>
           <a:xfrm>
-            <a:off x="8532876" y="1554480"/>
-            <a:ext cx="2308860" cy="2308860"/>
+            <a:off x="8666226" y="1783080"/>
+            <a:ext cx="2286000" cy="2286000"/>
           </a:xfrm>
           <a:prstGeom prst="ellipse">
             <a:avLst/>
@@ -3875,9 +4005,7 @@
             <a:srgbClr val="D1F7FA"/>
           </a:solidFill>
           <a:ln w="19050">
-            <a:solidFill>
-              <a:srgbClr val="26B8C5"/>
-            </a:solidFill>
+            <a:noFill/>
             <a:prstDash val="dash"/>
           </a:ln>
         </p:spPr>
@@ -3895,7 +4023,7 @@
             <a:r>
               <a:rPr sz="1200" b="0" i="0">
                 <a:solidFill>
-                  <a:srgbClr val="11595F"/>
+                  <a:srgbClr val="8E8780"/>
                 </a:solidFill>
               </a:rPr>
               <a:t>사진</a:t>
@@ -3905,14 +4033,14 @@
       </p:sp>
       <p:sp>
         <p:nvSpPr>
-          <p:cNvPr id="12" name="TextBox 11"/>
+          <p:cNvPr id="13" name="TextBox 12"/>
           <p:cNvSpPr txBox="1"/>
           <p:nvPr/>
         </p:nvSpPr>
         <p:spPr>
           <a:xfrm>
-            <a:off x="8005876" y="3954779"/>
-            <a:ext cx="3362858" cy="411480"/>
+            <a:off x="8066836" y="4160520"/>
+            <a:ext cx="3484778" cy="411480"/>
           </a:xfrm>
           <a:prstGeom prst="rect">
             <a:avLst/>
@@ -3933,7 +4061,7 @@
             <a:r>
               <a:rPr sz="1600" b="1" i="0">
                 <a:solidFill>
-                  <a:srgbClr val="11595F"/>
+                  <a:srgbClr val="274649"/>
                 </a:solidFill>
               </a:rPr>
               <a:t>내 하루</a:t>
@@ -3943,14 +4071,14 @@
       </p:sp>
       <p:sp>
         <p:nvSpPr>
-          <p:cNvPr id="13" name="TextBox 12"/>
+          <p:cNvPr id="14" name="TextBox 13"/>
           <p:cNvSpPr txBox="1"/>
           <p:nvPr/>
         </p:nvSpPr>
         <p:spPr>
           <a:xfrm>
-            <a:off x="8097316" y="4411979"/>
-            <a:ext cx="3179978" cy="1760219"/>
+            <a:off x="8158276" y="4617720"/>
+            <a:ext cx="3301898" cy="1737360"/>
           </a:xfrm>
           <a:prstGeom prst="rect">
             <a:avLst/>
@@ -4023,7 +4151,7 @@
     <p:bg>
       <p:bgPr>
         <a:solidFill>
-          <a:srgbClr val="EEFBFC"/>
+          <a:srgbClr val="D1F7FA"/>
         </a:solidFill>
         <a:effectLst/>
       </p:bgPr>
@@ -4043,46 +4171,86 @@
         </p:nvSpPr>
         <p:spPr>
           <a:xfrm>
-            <a:off x="256032" y="256032"/>
-            <a:ext cx="11679631" cy="6345936"/>
+            <a:off x="640080" y="566928"/>
+            <a:ext cx="64008" cy="868680"/>
+          </a:xfrm>
+          <a:prstGeom prst="roundRect">
+            <a:avLst>
+              <a:gd name="adj" fmla="val 50000"/>
+            </a:avLst>
+          </a:prstGeom>
+          <a:solidFill>
+            <a:srgbClr val="7BE0EA"/>
+          </a:solidFill>
+          <a:ln>
+            <a:noFill/>
+          </a:ln>
+        </p:spPr>
+        <p:txBody>
+          <a:bodyPr rtlCol="0" anchor="ctr"/>
+          <a:lstStyle/>
+          <a:p>
+            <a:pPr algn="ctr"/>
+          </a:p>
+        </p:txBody>
+      </p:sp>
+      <p:sp>
+        <p:nvSpPr>
+          <p:cNvPr id="4" name="상단 라벨"/>
+          <p:cNvSpPr txBox="1"/>
+          <p:nvPr/>
+        </p:nvSpPr>
+        <p:spPr>
+          <a:xfrm>
+            <a:off x="868680" y="274320"/>
+            <a:ext cx="5486400" cy="274320"/>
           </a:xfrm>
           <a:prstGeom prst="rect">
             <a:avLst/>
           </a:prstGeom>
           <a:noFill/>
-          <a:ln w="28575">
-            <a:solidFill>
-              <a:srgbClr val="26B8C5"/>
-            </a:solidFill>
-          </a:ln>
-        </p:spPr>
-        <p:txBody>
-          <a:bodyPr rtlCol="0" anchor="ctr"/>
-          <a:lstStyle/>
-          <a:p>
-            <a:pPr algn="ctr"/>
-          </a:p>
-        </p:txBody>
-      </p:sp>
-      <p:sp>
-        <p:nvSpPr>
-          <p:cNvPr id="4" name="장식"/>
+        </p:spPr>
+        <p:txBody>
+          <a:bodyPr wrap="square" lIns="54864" rIns="54864" tIns="27432" bIns="27432" anchor="ctr">
+            <a:noAutofit/>
+          </a:bodyPr>
+          <a:lstStyle/>
+          <a:p>
+            <a:pPr algn="l">
+              <a:lnSpc>
+                <a:spcPct val="115000"/>
+              </a:lnSpc>
+            </a:pPr>
+            <a:r>
+              <a:rPr sz="900" b="1" i="0" spc="250">
+                <a:solidFill>
+                  <a:srgbClr val="8E8780"/>
+                </a:solidFill>
+              </a:rPr>
+              <a:t>FAMILY ALBUM</a:t>
+            </a:r>
+          </a:p>
+        </p:txBody>
+      </p:sp>
+      <p:sp>
+        <p:nvSpPr>
+          <p:cNvPr id="5" name="포인트"/>
           <p:cNvSpPr/>
           <p:nvPr/>
         </p:nvSpPr>
         <p:spPr>
           <a:xfrm>
-            <a:off x="384048" y="384048"/>
-            <a:ext cx="11423599" cy="6089904"/>
-          </a:xfrm>
-          <a:prstGeom prst="rect">
+            <a:off x="11167567" y="667512"/>
+            <a:ext cx="310896" cy="310896"/>
+          </a:xfrm>
+          <a:prstGeom prst="mathPlus">
             <a:avLst/>
           </a:prstGeom>
-          <a:noFill/>
-          <a:ln w="9525">
-            <a:solidFill>
-              <a:srgbClr val="D1F7FA"/>
-            </a:solidFill>
+          <a:solidFill>
+            <a:srgbClr val="A5EDF3"/>
+          </a:solidFill>
+          <a:ln>
+            <a:noFill/>
           </a:ln>
         </p:spPr>
         <p:txBody>
@@ -4105,8 +4273,8 @@
         </p:nvSpPr>
         <p:spPr>
           <a:xfrm>
-            <a:off x="822960" y="548640"/>
-            <a:ext cx="9265615" cy="822960"/>
+            <a:off x="868680" y="566928"/>
+            <a:ext cx="9448495" cy="868680"/>
           </a:xfrm>
         </p:spPr>
         <p:txBody>
@@ -4123,7 +4291,7 @@
             <a:r>
               <a:rPr sz="3000" b="1" i="0">
                 <a:solidFill>
-                  <a:srgbClr val="11595F"/>
+                  <a:srgbClr val="26231F"/>
                 </a:solidFill>
               </a:rPr>
               <a:t>우리 가족 이야기</a:t>
@@ -4133,14 +4301,14 @@
       </p:sp>
       <p:sp>
         <p:nvSpPr>
-          <p:cNvPr id="5" name="타임라인 선"/>
+          <p:cNvPr id="6" name="타임라인 선"/>
           <p:cNvSpPr/>
           <p:nvPr/>
         </p:nvSpPr>
         <p:spPr>
           <a:xfrm>
-            <a:off x="822960" y="3291840"/>
-            <a:ext cx="10545775" cy="54864"/>
+            <a:off x="640080" y="3520440"/>
+            <a:ext cx="10911535" cy="54864"/>
           </a:xfrm>
           <a:prstGeom prst="rect">
             <a:avLst/>
@@ -4162,20 +4330,20 @@
       </p:sp>
       <p:sp>
         <p:nvSpPr>
-          <p:cNvPr id="6" name="때 1"/>
+          <p:cNvPr id="7" name="때 1"/>
           <p:cNvSpPr/>
           <p:nvPr/>
         </p:nvSpPr>
         <p:spPr>
           <a:xfrm>
-            <a:off x="1940013" y="3108960"/>
+            <a:off x="1802853" y="3337560"/>
             <a:ext cx="402336" cy="402336"/>
           </a:xfrm>
           <a:prstGeom prst="ellipse">
             <a:avLst/>
           </a:prstGeom>
           <a:solidFill>
-            <a:srgbClr val="26B8C5"/>
+            <a:srgbClr val="7BE0EA"/>
           </a:solidFill>
           <a:ln w="38100">
             <a:solidFill>
@@ -4193,14 +4361,14 @@
       </p:sp>
       <p:sp>
         <p:nvSpPr>
-          <p:cNvPr id="7" name="TextBox 6"/>
+          <p:cNvPr id="8" name="TextBox 7"/>
           <p:cNvSpPr txBox="1"/>
           <p:nvPr/>
         </p:nvSpPr>
         <p:spPr>
           <a:xfrm>
-            <a:off x="868680" y="2468880"/>
-            <a:ext cx="2545003" cy="457200"/>
+            <a:off x="685800" y="2697480"/>
+            <a:ext cx="2636443" cy="457200"/>
           </a:xfrm>
           <a:prstGeom prst="rect">
             <a:avLst/>
@@ -4221,7 +4389,7 @@
             <a:r>
               <a:rPr sz="1600" b="1" i="0">
                 <a:solidFill>
-                  <a:srgbClr val="26B8C5"/>
+                  <a:srgbClr val="7BE0EA"/>
                 </a:solidFill>
               </a:rPr>
               <a:t>태어난 곳</a:t>
@@ -4231,14 +4399,14 @@
       </p:sp>
       <p:sp>
         <p:nvSpPr>
-          <p:cNvPr id="8" name="TextBox 7"/>
+          <p:cNvPr id="9" name="TextBox 8"/>
           <p:cNvSpPr txBox="1"/>
           <p:nvPr/>
         </p:nvSpPr>
         <p:spPr>
           <a:xfrm>
-            <a:off x="914400" y="3657600"/>
-            <a:ext cx="2453563" cy="457200"/>
+            <a:off x="731519" y="3886200"/>
+            <a:ext cx="2545003" cy="457200"/>
           </a:xfrm>
           <a:prstGeom prst="rect">
             <a:avLst/>
@@ -4259,7 +4427,7 @@
             <a:r>
               <a:rPr sz="1800" b="1" i="0">
                 <a:solidFill>
-                  <a:srgbClr val="11595F"/>
+                  <a:srgbClr val="274649"/>
                 </a:solidFill>
               </a:rPr>
               <a:t>나의 뿌리</a:t>
@@ -4269,14 +4437,14 @@
       </p:sp>
       <p:sp>
         <p:nvSpPr>
-          <p:cNvPr id="9" name="TextBox 8"/>
+          <p:cNvPr id="10" name="TextBox 9"/>
           <p:cNvSpPr txBox="1"/>
           <p:nvPr/>
         </p:nvSpPr>
         <p:spPr>
           <a:xfrm>
-            <a:off x="914400" y="4160520"/>
-            <a:ext cx="2453563" cy="1645920"/>
+            <a:off x="731519" y="4389120"/>
+            <a:ext cx="2545003" cy="1645920"/>
           </a:xfrm>
           <a:prstGeom prst="rect">
             <a:avLst/>
@@ -4297,7 +4465,7 @@
             <a:r>
               <a:rPr sz="1500" b="0" i="0">
                 <a:solidFill>
-                  <a:srgbClr val="2B2B2B"/>
+                  <a:srgbClr val="26231F"/>
                 </a:solidFill>
               </a:rPr>
               <a:t>고향의 기억을 적어요</a:t>
@@ -4307,20 +4475,20 @@
       </p:sp>
       <p:sp>
         <p:nvSpPr>
-          <p:cNvPr id="10" name="때 2"/>
+          <p:cNvPr id="11" name="때 2"/>
           <p:cNvSpPr/>
           <p:nvPr/>
         </p:nvSpPr>
         <p:spPr>
           <a:xfrm>
-            <a:off x="4576457" y="3108960"/>
+            <a:off x="4530737" y="3337560"/>
             <a:ext cx="402336" cy="402336"/>
           </a:xfrm>
           <a:prstGeom prst="ellipse">
             <a:avLst/>
           </a:prstGeom>
           <a:solidFill>
-            <a:srgbClr val="26B8C5"/>
+            <a:srgbClr val="7BE0EA"/>
           </a:solidFill>
           <a:ln w="38100">
             <a:solidFill>
@@ -4338,14 +4506,14 @@
       </p:sp>
       <p:sp>
         <p:nvSpPr>
-          <p:cNvPr id="11" name="TextBox 10"/>
+          <p:cNvPr id="12" name="TextBox 11"/>
           <p:cNvSpPr txBox="1"/>
           <p:nvPr/>
         </p:nvSpPr>
         <p:spPr>
           <a:xfrm>
-            <a:off x="3505123" y="2468880"/>
-            <a:ext cx="2545003" cy="457200"/>
+            <a:off x="3413683" y="2697480"/>
+            <a:ext cx="2636443" cy="457200"/>
           </a:xfrm>
           <a:prstGeom prst="rect">
             <a:avLst/>
@@ -4366,7 +4534,7 @@
             <a:r>
               <a:rPr sz="1600" b="1" i="0">
                 <a:solidFill>
-                  <a:srgbClr val="26B8C5"/>
+                  <a:srgbClr val="7BE0EA"/>
                 </a:solidFill>
               </a:rPr>
               <a:t>학창 시절</a:t>
@@ -4376,14 +4544,14 @@
       </p:sp>
       <p:sp>
         <p:nvSpPr>
-          <p:cNvPr id="12" name="TextBox 11"/>
+          <p:cNvPr id="13" name="TextBox 12"/>
           <p:cNvSpPr txBox="1"/>
           <p:nvPr/>
         </p:nvSpPr>
         <p:spPr>
           <a:xfrm>
-            <a:off x="3550843" y="3657600"/>
-            <a:ext cx="2453563" cy="457200"/>
+            <a:off x="3459403" y="3886200"/>
+            <a:ext cx="2545003" cy="457200"/>
           </a:xfrm>
           <a:prstGeom prst="rect">
             <a:avLst/>
@@ -4404,7 +4572,7 @@
             <a:r>
               <a:rPr sz="1800" b="1" i="0">
                 <a:solidFill>
-                  <a:srgbClr val="11595F"/>
+                  <a:srgbClr val="274649"/>
                 </a:solidFill>
               </a:rPr>
               <a:t>자라던 시간</a:t>
@@ -4414,14 +4582,14 @@
       </p:sp>
       <p:sp>
         <p:nvSpPr>
-          <p:cNvPr id="13" name="TextBox 12"/>
+          <p:cNvPr id="14" name="TextBox 13"/>
           <p:cNvSpPr txBox="1"/>
           <p:nvPr/>
         </p:nvSpPr>
         <p:spPr>
           <a:xfrm>
-            <a:off x="3550843" y="4160520"/>
-            <a:ext cx="2453563" cy="1645920"/>
+            <a:off x="3459403" y="4389120"/>
+            <a:ext cx="2545003" cy="1645920"/>
           </a:xfrm>
           <a:prstGeom prst="rect">
             <a:avLst/>
@@ -4442,7 +4610,7 @@
             <a:r>
               <a:rPr sz="1500" b="0" i="0">
                 <a:solidFill>
-                  <a:srgbClr val="2B2B2B"/>
+                  <a:srgbClr val="26231F"/>
                 </a:solidFill>
               </a:rPr>
               <a:t>가장 좋았던 기억</a:t>
@@ -4452,20 +4620,20 @@
       </p:sp>
       <p:sp>
         <p:nvSpPr>
-          <p:cNvPr id="14" name="때 3"/>
+          <p:cNvPr id="15" name="때 3"/>
           <p:cNvSpPr/>
           <p:nvPr/>
         </p:nvSpPr>
         <p:spPr>
           <a:xfrm>
-            <a:off x="7212901" y="3108960"/>
+            <a:off x="7258621" y="3337560"/>
             <a:ext cx="402336" cy="402336"/>
           </a:xfrm>
           <a:prstGeom prst="ellipse">
             <a:avLst/>
           </a:prstGeom>
           <a:solidFill>
-            <a:srgbClr val="26B8C5"/>
+            <a:srgbClr val="7BE0EA"/>
           </a:solidFill>
           <a:ln w="38100">
             <a:solidFill>
@@ -4483,14 +4651,14 @@
       </p:sp>
       <p:sp>
         <p:nvSpPr>
-          <p:cNvPr id="15" name="TextBox 14"/>
+          <p:cNvPr id="16" name="TextBox 15"/>
           <p:cNvSpPr txBox="1"/>
           <p:nvPr/>
         </p:nvSpPr>
         <p:spPr>
           <a:xfrm>
-            <a:off x="6141567" y="2468880"/>
-            <a:ext cx="2545003" cy="457200"/>
+            <a:off x="6141567" y="2697480"/>
+            <a:ext cx="2636443" cy="457200"/>
           </a:xfrm>
           <a:prstGeom prst="rect">
             <a:avLst/>
@@ -4511,7 +4679,7 @@
             <a:r>
               <a:rPr sz="1600" b="1" i="0">
                 <a:solidFill>
-                  <a:srgbClr val="26B8C5"/>
+                  <a:srgbClr val="7BE0EA"/>
                 </a:solidFill>
               </a:rPr>
               <a:t>혼자 시작한 날</a:t>
@@ -4521,14 +4689,14 @@
       </p:sp>
       <p:sp>
         <p:nvSpPr>
-          <p:cNvPr id="16" name="TextBox 15"/>
+          <p:cNvPr id="17" name="TextBox 16"/>
           <p:cNvSpPr txBox="1"/>
           <p:nvPr/>
         </p:nvSpPr>
         <p:spPr>
           <a:xfrm>
-            <a:off x="6187287" y="3657600"/>
-            <a:ext cx="2453563" cy="457200"/>
+            <a:off x="6187287" y="3886200"/>
+            <a:ext cx="2545003" cy="457200"/>
           </a:xfrm>
           <a:prstGeom prst="rect">
             <a:avLst/>
@@ -4549,7 +4717,7 @@
             <a:r>
               <a:rPr sz="1800" b="1" i="0">
                 <a:solidFill>
-                  <a:srgbClr val="11595F"/>
+                  <a:srgbClr val="274649"/>
                 </a:solidFill>
               </a:rPr>
               <a:t>나의 첫 집</a:t>
@@ -4559,14 +4727,14 @@
       </p:sp>
       <p:sp>
         <p:nvSpPr>
-          <p:cNvPr id="17" name="TextBox 16"/>
+          <p:cNvPr id="18" name="TextBox 17"/>
           <p:cNvSpPr txBox="1"/>
           <p:nvPr/>
         </p:nvSpPr>
         <p:spPr>
           <a:xfrm>
-            <a:off x="6187287" y="4160520"/>
-            <a:ext cx="2453563" cy="1645920"/>
+            <a:off x="6187287" y="4389120"/>
+            <a:ext cx="2545003" cy="1645920"/>
           </a:xfrm>
           <a:prstGeom prst="rect">
             <a:avLst/>
@@ -4587,7 +4755,7 @@
             <a:r>
               <a:rPr sz="1500" b="0" i="0">
                 <a:solidFill>
-                  <a:srgbClr val="2B2B2B"/>
+                  <a:srgbClr val="26231F"/>
                 </a:solidFill>
               </a:rPr>
               <a:t>독립하던 날</a:t>
@@ -4597,20 +4765,20 @@
       </p:sp>
       <p:sp>
         <p:nvSpPr>
-          <p:cNvPr id="18" name="때 4"/>
+          <p:cNvPr id="19" name="때 4"/>
           <p:cNvSpPr/>
           <p:nvPr/>
         </p:nvSpPr>
         <p:spPr>
           <a:xfrm>
-            <a:off x="9849345" y="3108960"/>
+            <a:off x="9986505" y="3337560"/>
             <a:ext cx="402336" cy="402336"/>
           </a:xfrm>
           <a:prstGeom prst="ellipse">
             <a:avLst/>
           </a:prstGeom>
           <a:solidFill>
-            <a:srgbClr val="26B8C5"/>
+            <a:srgbClr val="7BE0EA"/>
           </a:solidFill>
           <a:ln w="38100">
             <a:solidFill>
@@ -4628,14 +4796,14 @@
       </p:sp>
       <p:sp>
         <p:nvSpPr>
-          <p:cNvPr id="19" name="TextBox 18"/>
+          <p:cNvPr id="20" name="TextBox 19"/>
           <p:cNvSpPr txBox="1"/>
           <p:nvPr/>
         </p:nvSpPr>
         <p:spPr>
           <a:xfrm>
-            <a:off x="8778011" y="2468880"/>
-            <a:ext cx="2545003" cy="457200"/>
+            <a:off x="8869451" y="2697480"/>
+            <a:ext cx="2636443" cy="457200"/>
           </a:xfrm>
           <a:prstGeom prst="rect">
             <a:avLst/>
@@ -4656,7 +4824,7 @@
             <a:r>
               <a:rPr sz="1600" b="1" i="0">
                 <a:solidFill>
-                  <a:srgbClr val="26B8C5"/>
+                  <a:srgbClr val="7BE0EA"/>
                 </a:solidFill>
               </a:rPr>
               <a:t>지금</a:t>
@@ -4666,14 +4834,14 @@
       </p:sp>
       <p:sp>
         <p:nvSpPr>
-          <p:cNvPr id="20" name="TextBox 19"/>
+          <p:cNvPr id="21" name="TextBox 20"/>
           <p:cNvSpPr txBox="1"/>
           <p:nvPr/>
         </p:nvSpPr>
         <p:spPr>
           <a:xfrm>
-            <a:off x="8823731" y="3657600"/>
-            <a:ext cx="2453563" cy="457200"/>
+            <a:off x="8915171" y="3886200"/>
+            <a:ext cx="2545003" cy="457200"/>
           </a:xfrm>
           <a:prstGeom prst="rect">
             <a:avLst/>
@@ -4694,7 +4862,7 @@
             <a:r>
               <a:rPr sz="1800" b="1" i="0">
                 <a:solidFill>
-                  <a:srgbClr val="11595F"/>
+                  <a:srgbClr val="274649"/>
                 </a:solidFill>
               </a:rPr>
               <a:t>오늘의 나</a:t>
@@ -4704,14 +4872,14 @@
       </p:sp>
       <p:sp>
         <p:nvSpPr>
-          <p:cNvPr id="21" name="TextBox 20"/>
+          <p:cNvPr id="22" name="TextBox 21"/>
           <p:cNvSpPr txBox="1"/>
           <p:nvPr/>
         </p:nvSpPr>
         <p:spPr>
           <a:xfrm>
-            <a:off x="8823731" y="4160520"/>
-            <a:ext cx="2453563" cy="1645920"/>
+            <a:off x="8915171" y="4389120"/>
+            <a:ext cx="2545003" cy="1645920"/>
           </a:xfrm>
           <a:prstGeom prst="rect">
             <a:avLst/>
@@ -4732,7 +4900,7 @@
             <a:r>
               <a:rPr sz="1500" b="0" i="0">
                 <a:solidFill>
-                  <a:srgbClr val="2B2B2B"/>
+                  <a:srgbClr val="26231F"/>
                 </a:solidFill>
               </a:rPr>
               <a:t>요즘 내 이야기</a:t>
@@ -4754,7 +4922,7 @@
     <p:bg>
       <p:bgPr>
         <a:solidFill>
-          <a:srgbClr val="EEFBFC"/>
+          <a:srgbClr val="D1F7FA"/>
         </a:solidFill>
         <a:effectLst/>
       </p:bgPr>
@@ -4774,46 +4942,86 @@
         </p:nvSpPr>
         <p:spPr>
           <a:xfrm>
-            <a:off x="256032" y="256032"/>
-            <a:ext cx="11679631" cy="6345936"/>
+            <a:off x="640080" y="566928"/>
+            <a:ext cx="64008" cy="868680"/>
+          </a:xfrm>
+          <a:prstGeom prst="roundRect">
+            <a:avLst>
+              <a:gd name="adj" fmla="val 50000"/>
+            </a:avLst>
+          </a:prstGeom>
+          <a:solidFill>
+            <a:srgbClr val="7BE0EA"/>
+          </a:solidFill>
+          <a:ln>
+            <a:noFill/>
+          </a:ln>
+        </p:spPr>
+        <p:txBody>
+          <a:bodyPr rtlCol="0" anchor="ctr"/>
+          <a:lstStyle/>
+          <a:p>
+            <a:pPr algn="ctr"/>
+          </a:p>
+        </p:txBody>
+      </p:sp>
+      <p:sp>
+        <p:nvSpPr>
+          <p:cNvPr id="4" name="상단 라벨"/>
+          <p:cNvSpPr txBox="1"/>
+          <p:nvPr/>
+        </p:nvSpPr>
+        <p:spPr>
+          <a:xfrm>
+            <a:off x="868680" y="274320"/>
+            <a:ext cx="5486400" cy="274320"/>
           </a:xfrm>
           <a:prstGeom prst="rect">
             <a:avLst/>
           </a:prstGeom>
           <a:noFill/>
-          <a:ln w="28575">
-            <a:solidFill>
-              <a:srgbClr val="26B8C5"/>
-            </a:solidFill>
-          </a:ln>
-        </p:spPr>
-        <p:txBody>
-          <a:bodyPr rtlCol="0" anchor="ctr"/>
-          <a:lstStyle/>
-          <a:p>
-            <a:pPr algn="ctr"/>
-          </a:p>
-        </p:txBody>
-      </p:sp>
-      <p:sp>
-        <p:nvSpPr>
-          <p:cNvPr id="4" name="장식"/>
+        </p:spPr>
+        <p:txBody>
+          <a:bodyPr wrap="square" lIns="54864" rIns="54864" tIns="27432" bIns="27432" anchor="ctr">
+            <a:noAutofit/>
+          </a:bodyPr>
+          <a:lstStyle/>
+          <a:p>
+            <a:pPr algn="l">
+              <a:lnSpc>
+                <a:spcPct val="115000"/>
+              </a:lnSpc>
+            </a:pPr>
+            <a:r>
+              <a:rPr sz="900" b="1" i="0" spc="250">
+                <a:solidFill>
+                  <a:srgbClr val="8E8780"/>
+                </a:solidFill>
+              </a:rPr>
+              <a:t>FAMILY ALBUM</a:t>
+            </a:r>
+          </a:p>
+        </p:txBody>
+      </p:sp>
+      <p:sp>
+        <p:nvSpPr>
+          <p:cNvPr id="5" name="포인트"/>
           <p:cNvSpPr/>
           <p:nvPr/>
         </p:nvSpPr>
         <p:spPr>
           <a:xfrm>
-            <a:off x="384048" y="384048"/>
-            <a:ext cx="11423599" cy="6089904"/>
-          </a:xfrm>
-          <a:prstGeom prst="rect">
+            <a:off x="11167567" y="667512"/>
+            <a:ext cx="310896" cy="310896"/>
+          </a:xfrm>
+          <a:prstGeom prst="mathPlus">
             <a:avLst/>
           </a:prstGeom>
-          <a:noFill/>
-          <a:ln w="9525">
-            <a:solidFill>
-              <a:srgbClr val="D1F7FA"/>
-            </a:solidFill>
+          <a:solidFill>
+            <a:srgbClr val="A5EDF3"/>
+          </a:solidFill>
+          <a:ln>
+            <a:noFill/>
           </a:ln>
         </p:spPr>
         <p:txBody>
@@ -4836,8 +5044,8 @@
         </p:nvSpPr>
         <p:spPr>
           <a:xfrm>
-            <a:off x="822960" y="548640"/>
-            <a:ext cx="9265615" cy="822960"/>
+            <a:off x="868680" y="566928"/>
+            <a:ext cx="9448495" cy="868680"/>
           </a:xfrm>
         </p:spPr>
         <p:txBody>
@@ -4854,7 +5062,7 @@
             <a:r>
               <a:rPr sz="3000" b="1" i="0">
                 <a:solidFill>
-                  <a:srgbClr val="11595F"/>
+                  <a:srgbClr val="26231F"/>
                 </a:solidFill>
               </a:rPr>
               <a:t>우리 가족의 약속</a:t>
@@ -4864,26 +5072,24 @@
       </p:sp>
       <p:sp>
         <p:nvSpPr>
-          <p:cNvPr id="5" name="줄 1"/>
+          <p:cNvPr id="6" name="줄 1"/>
           <p:cNvSpPr/>
           <p:nvPr/>
         </p:nvSpPr>
         <p:spPr>
           <a:xfrm>
-            <a:off x="822960" y="1554480"/>
-            <a:ext cx="10545775" cy="1005840"/>
+            <a:off x="640080" y="1783080"/>
+            <a:ext cx="10911535" cy="1005840"/>
           </a:xfrm>
           <a:prstGeom prst="roundRect">
             <a:avLst>
-              <a:gd name="adj" fmla="val 8000"/>
+              <a:gd name="adj" fmla="val 7000"/>
             </a:avLst>
           </a:prstGeom>
-          <a:solidFill>
-            <a:srgbClr val="EEFBFC"/>
-          </a:solidFill>
-          <a:ln w="12700">
+          <a:noFill/>
+          <a:ln w="15875">
             <a:solidFill>
-              <a:srgbClr val="D1F7FA"/>
+              <a:srgbClr val="7BE0EA"/>
             </a:solidFill>
           </a:ln>
         </p:spPr>
@@ -4897,23 +5103,23 @@
       </p:sp>
       <p:sp>
         <p:nvSpPr>
-          <p:cNvPr id="6" name="번호 1"/>
+          <p:cNvPr id="7" name="번호 1"/>
           <p:cNvSpPr/>
           <p:nvPr/>
         </p:nvSpPr>
         <p:spPr>
           <a:xfrm>
-            <a:off x="1005840" y="1828800"/>
+            <a:off x="822959" y="2057400"/>
             <a:ext cx="457200" cy="457200"/>
           </a:xfrm>
           <a:prstGeom prst="ellipse">
             <a:avLst/>
           </a:prstGeom>
-          <a:solidFill>
-            <a:srgbClr val="26B8C5"/>
-          </a:solidFill>
-          <a:ln>
-            <a:noFill/>
+          <a:noFill/>
+          <a:ln w="19050">
+            <a:solidFill>
+              <a:srgbClr val="7BE0EA"/>
+            </a:solidFill>
           </a:ln>
         </p:spPr>
         <p:txBody>
@@ -4930,7 +5136,7 @@
             <a:r>
               <a:rPr sz="1600" b="1" i="0">
                 <a:solidFill>
-                  <a:srgbClr val="FFFFFF"/>
+                  <a:srgbClr val="274649"/>
                 </a:solidFill>
               </a:rPr>
               <a:t>1</a:t>
@@ -4940,13 +5146,13 @@
       </p:sp>
       <p:sp>
         <p:nvSpPr>
-          <p:cNvPr id="7" name="TextBox 6"/>
+          <p:cNvPr id="8" name="TextBox 7"/>
           <p:cNvSpPr txBox="1"/>
           <p:nvPr/>
         </p:nvSpPr>
         <p:spPr>
           <a:xfrm>
-            <a:off x="1691640" y="1600200"/>
+            <a:off x="1508760" y="1828800"/>
             <a:ext cx="2743200" cy="914400"/>
           </a:xfrm>
           <a:prstGeom prst="rect">
@@ -4968,7 +5174,7 @@
             <a:r>
               <a:rPr sz="1800" b="1" i="0">
                 <a:solidFill>
-                  <a:srgbClr val="11595F"/>
+                  <a:srgbClr val="274649"/>
                 </a:solidFill>
               </a:rPr>
               <a:t>약속 1</a:t>
@@ -4978,14 +5184,14 @@
       </p:sp>
       <p:sp>
         <p:nvSpPr>
-          <p:cNvPr id="8" name="TextBox 7"/>
+          <p:cNvPr id="9" name="TextBox 8"/>
           <p:cNvSpPr txBox="1"/>
           <p:nvPr/>
         </p:nvSpPr>
         <p:spPr>
           <a:xfrm>
-            <a:off x="4480560" y="1600200"/>
-            <a:ext cx="6705295" cy="914400"/>
+            <a:off x="4297680" y="1828800"/>
+            <a:ext cx="7071055" cy="914400"/>
           </a:xfrm>
           <a:prstGeom prst="rect">
             <a:avLst/>
@@ -5006,7 +5212,7 @@
             <a:r>
               <a:rPr sz="1700" b="0" i="0">
                 <a:solidFill>
-                  <a:srgbClr val="2B2B2B"/>
+                  <a:srgbClr val="26231F"/>
                 </a:solidFill>
               </a:rPr>
               <a:t>나를 위한 밥상 차리기</a:t>
@@ -5016,26 +5222,24 @@
       </p:sp>
       <p:sp>
         <p:nvSpPr>
-          <p:cNvPr id="9" name="줄 2"/>
+          <p:cNvPr id="10" name="줄 2"/>
           <p:cNvSpPr/>
           <p:nvPr/>
         </p:nvSpPr>
         <p:spPr>
           <a:xfrm>
-            <a:off x="822960" y="2697480"/>
-            <a:ext cx="10545775" cy="1005840"/>
+            <a:off x="640080" y="2926080"/>
+            <a:ext cx="10911535" cy="1005840"/>
           </a:xfrm>
           <a:prstGeom prst="roundRect">
             <a:avLst>
-              <a:gd name="adj" fmla="val 8000"/>
+              <a:gd name="adj" fmla="val 7000"/>
             </a:avLst>
           </a:prstGeom>
-          <a:solidFill>
-            <a:srgbClr val="EEFBFC"/>
-          </a:solidFill>
-          <a:ln w="12700">
+          <a:noFill/>
+          <a:ln w="15875">
             <a:solidFill>
-              <a:srgbClr val="D1F7FA"/>
+              <a:srgbClr val="7BE0EA"/>
             </a:solidFill>
           </a:ln>
         </p:spPr>
@@ -5049,23 +5253,23 @@
       </p:sp>
       <p:sp>
         <p:nvSpPr>
-          <p:cNvPr id="10" name="번호 2"/>
+          <p:cNvPr id="11" name="번호 2"/>
           <p:cNvSpPr/>
           <p:nvPr/>
         </p:nvSpPr>
         <p:spPr>
           <a:xfrm>
-            <a:off x="1005840" y="2971800"/>
+            <a:off x="822959" y="3200400"/>
             <a:ext cx="457200" cy="457200"/>
           </a:xfrm>
           <a:prstGeom prst="ellipse">
             <a:avLst/>
           </a:prstGeom>
-          <a:solidFill>
-            <a:srgbClr val="26B8C5"/>
-          </a:solidFill>
-          <a:ln>
-            <a:noFill/>
+          <a:noFill/>
+          <a:ln w="19050">
+            <a:solidFill>
+              <a:srgbClr val="7BE0EA"/>
+            </a:solidFill>
           </a:ln>
         </p:spPr>
         <p:txBody>
@@ -5082,7 +5286,7 @@
             <a:r>
               <a:rPr sz="1600" b="1" i="0">
                 <a:solidFill>
-                  <a:srgbClr val="FFFFFF"/>
+                  <a:srgbClr val="274649"/>
                 </a:solidFill>
               </a:rPr>
               <a:t>2</a:t>
@@ -5092,13 +5296,13 @@
       </p:sp>
       <p:sp>
         <p:nvSpPr>
-          <p:cNvPr id="11" name="TextBox 10"/>
+          <p:cNvPr id="12" name="TextBox 11"/>
           <p:cNvSpPr txBox="1"/>
           <p:nvPr/>
         </p:nvSpPr>
         <p:spPr>
           <a:xfrm>
-            <a:off x="1691640" y="2743200"/>
+            <a:off x="1508760" y="2971800"/>
             <a:ext cx="2743200" cy="914400"/>
           </a:xfrm>
           <a:prstGeom prst="rect">
@@ -5120,7 +5324,7 @@
             <a:r>
               <a:rPr sz="1800" b="1" i="0">
                 <a:solidFill>
-                  <a:srgbClr val="11595F"/>
+                  <a:srgbClr val="274649"/>
                 </a:solidFill>
               </a:rPr>
               <a:t>약속 2</a:t>
@@ -5130,14 +5334,14 @@
       </p:sp>
       <p:sp>
         <p:nvSpPr>
-          <p:cNvPr id="12" name="TextBox 11"/>
+          <p:cNvPr id="13" name="TextBox 12"/>
           <p:cNvSpPr txBox="1"/>
           <p:nvPr/>
         </p:nvSpPr>
         <p:spPr>
           <a:xfrm>
-            <a:off x="4480560" y="2743200"/>
-            <a:ext cx="6705295" cy="914400"/>
+            <a:off x="4297680" y="2971800"/>
+            <a:ext cx="7071055" cy="914400"/>
           </a:xfrm>
           <a:prstGeom prst="rect">
             <a:avLst/>
@@ -5158,7 +5362,7 @@
             <a:r>
               <a:rPr sz="1700" b="0" i="0">
                 <a:solidFill>
-                  <a:srgbClr val="2B2B2B"/>
+                  <a:srgbClr val="26231F"/>
                 </a:solidFill>
               </a:rPr>
               <a:t>하루 십 분 나에게 쓰는 시간</a:t>
@@ -5168,26 +5372,24 @@
       </p:sp>
       <p:sp>
         <p:nvSpPr>
-          <p:cNvPr id="13" name="줄 3"/>
+          <p:cNvPr id="14" name="줄 3"/>
           <p:cNvSpPr/>
           <p:nvPr/>
         </p:nvSpPr>
         <p:spPr>
           <a:xfrm>
-            <a:off x="822960" y="3840480"/>
-            <a:ext cx="10545775" cy="1005840"/>
+            <a:off x="640080" y="4069080"/>
+            <a:ext cx="10911535" cy="1005840"/>
           </a:xfrm>
           <a:prstGeom prst="roundRect">
             <a:avLst>
-              <a:gd name="adj" fmla="val 8000"/>
+              <a:gd name="adj" fmla="val 7000"/>
             </a:avLst>
           </a:prstGeom>
-          <a:solidFill>
-            <a:srgbClr val="EEFBFC"/>
-          </a:solidFill>
-          <a:ln w="12700">
+          <a:noFill/>
+          <a:ln w="15875">
             <a:solidFill>
-              <a:srgbClr val="D1F7FA"/>
+              <a:srgbClr val="7BE0EA"/>
             </a:solidFill>
           </a:ln>
         </p:spPr>
@@ -5201,23 +5403,23 @@
       </p:sp>
       <p:sp>
         <p:nvSpPr>
-          <p:cNvPr id="14" name="번호 3"/>
+          <p:cNvPr id="15" name="번호 3"/>
           <p:cNvSpPr/>
           <p:nvPr/>
         </p:nvSpPr>
         <p:spPr>
           <a:xfrm>
-            <a:off x="1005840" y="4114800"/>
+            <a:off x="822959" y="4343400"/>
             <a:ext cx="457200" cy="457200"/>
           </a:xfrm>
           <a:prstGeom prst="ellipse">
             <a:avLst/>
           </a:prstGeom>
-          <a:solidFill>
-            <a:srgbClr val="26B8C5"/>
-          </a:solidFill>
-          <a:ln>
-            <a:noFill/>
+          <a:noFill/>
+          <a:ln w="19050">
+            <a:solidFill>
+              <a:srgbClr val="7BE0EA"/>
+            </a:solidFill>
           </a:ln>
         </p:spPr>
         <p:txBody>
@@ -5234,7 +5436,7 @@
             <a:r>
               <a:rPr sz="1600" b="1" i="0">
                 <a:solidFill>
-                  <a:srgbClr val="FFFFFF"/>
+                  <a:srgbClr val="274649"/>
                 </a:solidFill>
               </a:rPr>
               <a:t>3</a:t>
@@ -5244,13 +5446,13 @@
       </p:sp>
       <p:sp>
         <p:nvSpPr>
-          <p:cNvPr id="15" name="TextBox 14"/>
+          <p:cNvPr id="16" name="TextBox 15"/>
           <p:cNvSpPr txBox="1"/>
           <p:nvPr/>
         </p:nvSpPr>
         <p:spPr>
           <a:xfrm>
-            <a:off x="1691640" y="3886200"/>
+            <a:off x="1508760" y="4114800"/>
             <a:ext cx="2743200" cy="914400"/>
           </a:xfrm>
           <a:prstGeom prst="rect">
@@ -5272,7 +5474,7 @@
             <a:r>
               <a:rPr sz="1800" b="1" i="0">
                 <a:solidFill>
-                  <a:srgbClr val="11595F"/>
+                  <a:srgbClr val="274649"/>
                 </a:solidFill>
               </a:rPr>
               <a:t>약속 3</a:t>
@@ -5282,14 +5484,14 @@
       </p:sp>
       <p:sp>
         <p:nvSpPr>
-          <p:cNvPr id="16" name="TextBox 15"/>
+          <p:cNvPr id="17" name="TextBox 16"/>
           <p:cNvSpPr txBox="1"/>
           <p:nvPr/>
         </p:nvSpPr>
         <p:spPr>
           <a:xfrm>
-            <a:off x="4480560" y="3886200"/>
-            <a:ext cx="6705295" cy="914400"/>
+            <a:off x="4297680" y="4114800"/>
+            <a:ext cx="7071055" cy="914400"/>
           </a:xfrm>
           <a:prstGeom prst="rect">
             <a:avLst/>
@@ -5310,7 +5512,7 @@
             <a:r>
               <a:rPr sz="1700" b="0" i="0">
                 <a:solidFill>
-                  <a:srgbClr val="2B2B2B"/>
+                  <a:srgbClr val="26231F"/>
                 </a:solidFill>
               </a:rPr>
               <a:t>안부를 전할 사람 한 명 챙기기</a:t>
@@ -5332,7 +5534,7 @@
     <p:bg>
       <p:bgPr>
         <a:solidFill>
-          <a:srgbClr val="EEFBFC"/>
+          <a:srgbClr val="D1F7FA"/>
         </a:solidFill>
         <a:effectLst/>
       </p:bgPr>
@@ -5352,46 +5554,86 @@
         </p:nvSpPr>
         <p:spPr>
           <a:xfrm>
-            <a:off x="256032" y="256032"/>
-            <a:ext cx="11679631" cy="6345936"/>
+            <a:off x="640080" y="566928"/>
+            <a:ext cx="64008" cy="868680"/>
+          </a:xfrm>
+          <a:prstGeom prst="roundRect">
+            <a:avLst>
+              <a:gd name="adj" fmla="val 50000"/>
+            </a:avLst>
+          </a:prstGeom>
+          <a:solidFill>
+            <a:srgbClr val="7BE0EA"/>
+          </a:solidFill>
+          <a:ln>
+            <a:noFill/>
+          </a:ln>
+        </p:spPr>
+        <p:txBody>
+          <a:bodyPr rtlCol="0" anchor="ctr"/>
+          <a:lstStyle/>
+          <a:p>
+            <a:pPr algn="ctr"/>
+          </a:p>
+        </p:txBody>
+      </p:sp>
+      <p:sp>
+        <p:nvSpPr>
+          <p:cNvPr id="4" name="상단 라벨"/>
+          <p:cNvSpPr txBox="1"/>
+          <p:nvPr/>
+        </p:nvSpPr>
+        <p:spPr>
+          <a:xfrm>
+            <a:off x="868680" y="274320"/>
+            <a:ext cx="5486400" cy="274320"/>
           </a:xfrm>
           <a:prstGeom prst="rect">
             <a:avLst/>
           </a:prstGeom>
           <a:noFill/>
-          <a:ln w="28575">
-            <a:solidFill>
-              <a:srgbClr val="26B8C5"/>
-            </a:solidFill>
-          </a:ln>
-        </p:spPr>
-        <p:txBody>
-          <a:bodyPr rtlCol="0" anchor="ctr"/>
-          <a:lstStyle/>
-          <a:p>
-            <a:pPr algn="ctr"/>
-          </a:p>
-        </p:txBody>
-      </p:sp>
-      <p:sp>
-        <p:nvSpPr>
-          <p:cNvPr id="4" name="장식"/>
+        </p:spPr>
+        <p:txBody>
+          <a:bodyPr wrap="square" lIns="54864" rIns="54864" tIns="27432" bIns="27432" anchor="ctr">
+            <a:noAutofit/>
+          </a:bodyPr>
+          <a:lstStyle/>
+          <a:p>
+            <a:pPr algn="l">
+              <a:lnSpc>
+                <a:spcPct val="115000"/>
+              </a:lnSpc>
+            </a:pPr>
+            <a:r>
+              <a:rPr sz="900" b="1" i="0" spc="250">
+                <a:solidFill>
+                  <a:srgbClr val="8E8780"/>
+                </a:solidFill>
+              </a:rPr>
+              <a:t>FAMILY ALBUM</a:t>
+            </a:r>
+          </a:p>
+        </p:txBody>
+      </p:sp>
+      <p:sp>
+        <p:nvSpPr>
+          <p:cNvPr id="5" name="포인트"/>
           <p:cNvSpPr/>
           <p:nvPr/>
         </p:nvSpPr>
         <p:spPr>
           <a:xfrm>
-            <a:off x="384048" y="384048"/>
-            <a:ext cx="11423599" cy="6089904"/>
-          </a:xfrm>
-          <a:prstGeom prst="rect">
+            <a:off x="11167567" y="667512"/>
+            <a:ext cx="310896" cy="310896"/>
+          </a:xfrm>
+          <a:prstGeom prst="mathPlus">
             <a:avLst/>
           </a:prstGeom>
-          <a:noFill/>
-          <a:ln w="9525">
-            <a:solidFill>
-              <a:srgbClr val="D1F7FA"/>
-            </a:solidFill>
+          <a:solidFill>
+            <a:srgbClr val="A5EDF3"/>
+          </a:solidFill>
+          <a:ln>
+            <a:noFill/>
           </a:ln>
         </p:spPr>
         <p:txBody>
@@ -5414,8 +5656,8 @@
         </p:nvSpPr>
         <p:spPr>
           <a:xfrm>
-            <a:off x="822960" y="548640"/>
-            <a:ext cx="9265615" cy="822960"/>
+            <a:off x="868680" y="566928"/>
+            <a:ext cx="9448495" cy="868680"/>
           </a:xfrm>
         </p:spPr>
         <p:txBody>
@@ -5432,7 +5674,7 @@
             <a:r>
               <a:rPr sz="3000" b="1" i="0">
                 <a:solidFill>
-                  <a:srgbClr val="11595F"/>
+                  <a:srgbClr val="26231F"/>
                 </a:solidFill>
               </a:rPr>
               <a:t>가족 사진</a:t>
@@ -5442,14 +5684,14 @@
       </p:sp>
       <p:sp>
         <p:nvSpPr>
-          <p:cNvPr id="5" name="사진 자리"/>
+          <p:cNvPr id="6" name="사진 자리"/>
           <p:cNvSpPr/>
           <p:nvPr/>
         </p:nvSpPr>
         <p:spPr>
           <a:xfrm>
-            <a:off x="822960" y="1554480"/>
-            <a:ext cx="3393338" cy="2217420"/>
+            <a:off x="640080" y="1783080"/>
+            <a:ext cx="3515258" cy="2194560"/>
           </a:xfrm>
           <a:prstGeom prst="roundRect">
             <a:avLst>
@@ -5460,9 +5702,7 @@
             <a:srgbClr val="D1F7FA"/>
           </a:solidFill>
           <a:ln w="19050">
-            <a:solidFill>
-              <a:srgbClr val="26B8C5"/>
-            </a:solidFill>
+            <a:noFill/>
             <a:prstDash val="dash"/>
           </a:ln>
         </p:spPr>
@@ -5480,7 +5720,7 @@
             <a:r>
               <a:rPr sz="1200" b="0" i="0">
                 <a:solidFill>
-                  <a:srgbClr val="11595F"/>
+                  <a:srgbClr val="8E8780"/>
                 </a:solidFill>
               </a:rPr>
               <a:t>사진 1</a:t>
@@ -5490,14 +5730,14 @@
       </p:sp>
       <p:sp>
         <p:nvSpPr>
-          <p:cNvPr id="6" name="사진 자리"/>
+          <p:cNvPr id="7" name="사진 자리"/>
           <p:cNvSpPr/>
           <p:nvPr/>
         </p:nvSpPr>
         <p:spPr>
           <a:xfrm>
-            <a:off x="4399178" y="1554480"/>
-            <a:ext cx="3393338" cy="2217420"/>
+            <a:off x="4338218" y="1783080"/>
+            <a:ext cx="3515258" cy="2194560"/>
           </a:xfrm>
           <a:prstGeom prst="roundRect">
             <a:avLst>
@@ -5508,9 +5748,7 @@
             <a:srgbClr val="D1F7FA"/>
           </a:solidFill>
           <a:ln w="19050">
-            <a:solidFill>
-              <a:srgbClr val="26B8C5"/>
-            </a:solidFill>
+            <a:noFill/>
             <a:prstDash val="dash"/>
           </a:ln>
         </p:spPr>
@@ -5528,7 +5766,7 @@
             <a:r>
               <a:rPr sz="1200" b="0" i="0">
                 <a:solidFill>
-                  <a:srgbClr val="11595F"/>
+                  <a:srgbClr val="8E8780"/>
                 </a:solidFill>
               </a:rPr>
               <a:t>사진 2</a:t>
@@ -5538,14 +5776,14 @@
       </p:sp>
       <p:sp>
         <p:nvSpPr>
-          <p:cNvPr id="7" name="사진 자리"/>
+          <p:cNvPr id="8" name="사진 자리"/>
           <p:cNvSpPr/>
           <p:nvPr/>
         </p:nvSpPr>
         <p:spPr>
           <a:xfrm>
-            <a:off x="7975396" y="1554480"/>
-            <a:ext cx="3393338" cy="2217420"/>
+            <a:off x="8036356" y="1783080"/>
+            <a:ext cx="3515258" cy="2194560"/>
           </a:xfrm>
           <a:prstGeom prst="roundRect">
             <a:avLst>
@@ -5556,9 +5794,7 @@
             <a:srgbClr val="D1F7FA"/>
           </a:solidFill>
           <a:ln w="19050">
-            <a:solidFill>
-              <a:srgbClr val="26B8C5"/>
-            </a:solidFill>
+            <a:noFill/>
             <a:prstDash val="dash"/>
           </a:ln>
         </p:spPr>
@@ -5576,7 +5812,7 @@
             <a:r>
               <a:rPr sz="1200" b="0" i="0">
                 <a:solidFill>
-                  <a:srgbClr val="11595F"/>
+                  <a:srgbClr val="8E8780"/>
                 </a:solidFill>
               </a:rPr>
               <a:t>사진 3</a:t>
@@ -5586,14 +5822,14 @@
       </p:sp>
       <p:sp>
         <p:nvSpPr>
-          <p:cNvPr id="8" name="사진 자리"/>
+          <p:cNvPr id="9" name="사진 자리"/>
           <p:cNvSpPr/>
           <p:nvPr/>
         </p:nvSpPr>
         <p:spPr>
           <a:xfrm>
-            <a:off x="822960" y="3954780"/>
-            <a:ext cx="3393338" cy="2217420"/>
+            <a:off x="640080" y="4160520"/>
+            <a:ext cx="3515258" cy="2194560"/>
           </a:xfrm>
           <a:prstGeom prst="roundRect">
             <a:avLst>
@@ -5604,9 +5840,7 @@
             <a:srgbClr val="D1F7FA"/>
           </a:solidFill>
           <a:ln w="19050">
-            <a:solidFill>
-              <a:srgbClr val="26B8C5"/>
-            </a:solidFill>
+            <a:noFill/>
             <a:prstDash val="dash"/>
           </a:ln>
         </p:spPr>
@@ -5624,7 +5858,7 @@
             <a:r>
               <a:rPr sz="1200" b="0" i="0">
                 <a:solidFill>
-                  <a:srgbClr val="11595F"/>
+                  <a:srgbClr val="8E8780"/>
                 </a:solidFill>
               </a:rPr>
               <a:t>사진 4</a:t>
@@ -5634,14 +5868,14 @@
       </p:sp>
       <p:sp>
         <p:nvSpPr>
-          <p:cNvPr id="9" name="사진 자리"/>
+          <p:cNvPr id="10" name="사진 자리"/>
           <p:cNvSpPr/>
           <p:nvPr/>
         </p:nvSpPr>
         <p:spPr>
           <a:xfrm>
-            <a:off x="4399178" y="3954780"/>
-            <a:ext cx="3393338" cy="2217420"/>
+            <a:off x="4338218" y="4160520"/>
+            <a:ext cx="3515258" cy="2194560"/>
           </a:xfrm>
           <a:prstGeom prst="roundRect">
             <a:avLst>
@@ -5652,9 +5886,7 @@
             <a:srgbClr val="D1F7FA"/>
           </a:solidFill>
           <a:ln w="19050">
-            <a:solidFill>
-              <a:srgbClr val="26B8C5"/>
-            </a:solidFill>
+            <a:noFill/>
             <a:prstDash val="dash"/>
           </a:ln>
         </p:spPr>
@@ -5672,7 +5904,7 @@
             <a:r>
               <a:rPr sz="1200" b="0" i="0">
                 <a:solidFill>
-                  <a:srgbClr val="11595F"/>
+                  <a:srgbClr val="8E8780"/>
                 </a:solidFill>
               </a:rPr>
               <a:t>사진 5</a:t>
@@ -5682,14 +5914,14 @@
       </p:sp>
       <p:sp>
         <p:nvSpPr>
-          <p:cNvPr id="10" name="사진 자리"/>
+          <p:cNvPr id="11" name="사진 자리"/>
           <p:cNvSpPr/>
           <p:nvPr/>
         </p:nvSpPr>
         <p:spPr>
           <a:xfrm>
-            <a:off x="7975396" y="3954780"/>
-            <a:ext cx="3393338" cy="2217420"/>
+            <a:off x="8036356" y="4160520"/>
+            <a:ext cx="3515258" cy="2194560"/>
           </a:xfrm>
           <a:prstGeom prst="roundRect">
             <a:avLst>
@@ -5700,9 +5932,7 @@
             <a:srgbClr val="D1F7FA"/>
           </a:solidFill>
           <a:ln w="19050">
-            <a:solidFill>
-              <a:srgbClr val="26B8C5"/>
-            </a:solidFill>
+            <a:noFill/>
             <a:prstDash val="dash"/>
           </a:ln>
         </p:spPr>
@@ -5720,7 +5950,7 @@
             <a:r>
               <a:rPr sz="1200" b="0" i="0">
                 <a:solidFill>
-                  <a:srgbClr val="11595F"/>
+                  <a:srgbClr val="8E8780"/>
                 </a:solidFill>
               </a:rPr>
               <a:t>사진 6</a:t>
@@ -5739,6 +5969,14 @@
 <file path=ppt/slides/slide6.xml><?xml version="1.0" encoding="utf-8"?>
 <p:sld xmlns:a="http://schemas.openxmlformats.org/drawingml/2006/main" xmlns:p="http://schemas.openxmlformats.org/presentationml/2006/main" xmlns:r="http://schemas.openxmlformats.org/officeDocument/2006/relationships">
   <p:cSld>
+    <p:bg>
+      <p:bgPr>
+        <a:solidFill>
+          <a:srgbClr val="EAFBFD"/>
+        </a:solidFill>
+        <a:effectLst/>
+      </p:bgPr>
+    </p:bg>
     <p:spTree>
       <p:nvGrpSpPr>
         <p:cNvPr id="1" name=""/>
@@ -5746,30 +5984,116 @@
         <p:nvPr/>
       </p:nvGrpSpPr>
       <p:grpSpPr/>
-      <p:pic>
-        <p:nvPicPr>
-          <p:cNvPr id="3" name="표지 그림" descr="family-24.jpg"/>
-          <p:cNvPicPr>
-            <a:picLocks noChangeAspect="1"/>
-          </p:cNvPicPr>
+      <p:sp>
+        <p:nvSpPr>
+          <p:cNvPr id="3" name="사진 자리"/>
+          <p:cNvSpPr/>
           <p:nvPr/>
-        </p:nvPicPr>
-        <p:blipFill>
-          <a:blip r:embed="rId2"/>
-          <a:stretch>
-            <a:fillRect/>
-          </a:stretch>
-        </p:blipFill>
+        </p:nvSpPr>
         <p:spPr>
           <a:xfrm>
             <a:off x="0" y="0"/>
-            <a:ext cx="12191695" cy="6858000"/>
+            <a:ext cx="4389010" cy="6858000"/>
           </a:xfrm>
           <a:prstGeom prst="rect">
             <a:avLst/>
           </a:prstGeom>
-        </p:spPr>
-      </p:pic>
+          <a:solidFill>
+            <a:srgbClr val="A5EDF3"/>
+          </a:solidFill>
+          <a:ln>
+            <a:noFill/>
+          </a:ln>
+        </p:spPr>
+        <p:txBody>
+          <a:bodyPr rtlCol="0" anchor="ctr" wrap="square" lIns="54864" rIns="54864" tIns="27432" bIns="27432">
+            <a:noAutofit/>
+          </a:bodyPr>
+          <a:lstStyle/>
+          <a:p>
+            <a:pPr algn="ctr">
+              <a:lnSpc>
+                <a:spcPct val="100000"/>
+              </a:lnSpc>
+            </a:pPr>
+            <a:r>
+              <a:rPr sz="1400" b="0" i="0">
+                <a:solidFill>
+                  <a:srgbClr val="274649"/>
+                </a:solidFill>
+              </a:rPr>
+              <a:t>사진을 넣어 주세요</a:t>
+            </a:r>
+          </a:p>
+        </p:txBody>
+      </p:sp>
+      <p:sp>
+        <p:nvSpPr>
+          <p:cNvPr id="4" name="장식"/>
+          <p:cNvSpPr/>
+          <p:nvPr/>
+        </p:nvSpPr>
+        <p:spPr>
+          <a:xfrm>
+            <a:off x="365750" y="365760"/>
+            <a:ext cx="3657508" cy="6126480"/>
+          </a:xfrm>
+          <a:prstGeom prst="rect">
+            <a:avLst/>
+          </a:prstGeom>
+          <a:noFill/>
+          <a:ln w="9525">
+            <a:solidFill>
+              <a:srgbClr val="26231F"/>
+            </a:solidFill>
+          </a:ln>
+        </p:spPr>
+        <p:txBody>
+          <a:bodyPr rtlCol="0" anchor="ctr"/>
+          <a:lstStyle/>
+          <a:p>
+            <a:pPr algn="ctr"/>
+          </a:p>
+        </p:txBody>
+      </p:sp>
+      <p:sp>
+        <p:nvSpPr>
+          <p:cNvPr id="5" name="라벨"/>
+          <p:cNvSpPr txBox="1"/>
+          <p:nvPr/>
+        </p:nvSpPr>
+        <p:spPr>
+          <a:xfrm>
+            <a:off x="6827349" y="2148840"/>
+            <a:ext cx="4632844" cy="274320"/>
+          </a:xfrm>
+          <a:prstGeom prst="rect">
+            <a:avLst/>
+          </a:prstGeom>
+          <a:noFill/>
+        </p:spPr>
+        <p:txBody>
+          <a:bodyPr wrap="square" lIns="54864" rIns="54864" tIns="27432" bIns="27432" anchor="t">
+            <a:noAutofit/>
+          </a:bodyPr>
+          <a:lstStyle/>
+          <a:p>
+            <a:pPr algn="l">
+              <a:lnSpc>
+                <a:spcPct val="115000"/>
+              </a:lnSpc>
+            </a:pPr>
+            <a:r>
+              <a:rPr sz="1000" b="1" i="0" spc="250">
+                <a:solidFill>
+                  <a:srgbClr val="26231F"/>
+                </a:solidFill>
+              </a:rPr>
+              <a:t>FAMILY ALBUM</a:t>
+            </a:r>
+          </a:p>
+        </p:txBody>
+      </p:sp>
       <p:sp>
         <p:nvSpPr>
           <p:cNvPr id="2" name="Title 1"/>
@@ -5782,8 +6106,8 @@
         </p:nvSpPr>
         <p:spPr>
           <a:xfrm>
-            <a:off x="853418" y="2057400"/>
-            <a:ext cx="6095847" cy="1554480"/>
+            <a:off x="6827349" y="2606040"/>
+            <a:ext cx="4632844" cy="1188720"/>
           </a:xfrm>
         </p:spPr>
         <p:txBody>
@@ -5798,9 +6122,9 @@
               </a:lnSpc>
             </a:pPr>
             <a:r>
-              <a:rPr sz="3600" b="1" i="0">
-                <a:solidFill>
-                  <a:srgbClr val="11595F"/>
+              <a:rPr sz="4000" b="1" i="0">
+                <a:solidFill>
+                  <a:srgbClr val="26231F"/>
                 </a:solidFill>
               </a:rPr>
               <a:t>우리 가족 소개를 마칩니다</a:t>
@@ -5810,14 +6134,14 @@
       </p:sp>
       <p:sp>
         <p:nvSpPr>
-          <p:cNvPr id="4" name="한 줄 문구"/>
+          <p:cNvPr id="6" name="한 줄 문구"/>
           <p:cNvSpPr txBox="1"/>
           <p:nvPr/>
         </p:nvSpPr>
         <p:spPr>
           <a:xfrm>
-            <a:off x="853418" y="3749039"/>
-            <a:ext cx="6095847" cy="822960"/>
+            <a:off x="6827349" y="3886200"/>
+            <a:ext cx="4632844" cy="822960"/>
           </a:xfrm>
           <a:prstGeom prst="rect">
             <a:avLst/>
@@ -5836,9 +6160,9 @@
               </a:lnSpc>
             </a:pPr>
             <a:r>
-              <a:rPr sz="1700" b="0" i="1">
-                <a:solidFill>
-                  <a:srgbClr val="11595F"/>
+              <a:rPr sz="1700" b="0" i="0">
+                <a:solidFill>
+                  <a:srgbClr val="26231F"/>
                 </a:solidFill>
               </a:rPr>
               <a:t>읽어 주셔서 고맙습니다</a:t>
@@ -5848,14 +6172,14 @@
       </p:sp>
       <p:sp>
         <p:nvSpPr>
-          <p:cNvPr id="5" name="안내 문구"/>
+          <p:cNvPr id="7" name="안내 문구"/>
           <p:cNvSpPr txBox="1"/>
           <p:nvPr/>
         </p:nvSpPr>
         <p:spPr>
           <a:xfrm>
-            <a:off x="853418" y="4617720"/>
-            <a:ext cx="6095847" cy="914400"/>
+            <a:off x="6827349" y="4754880"/>
+            <a:ext cx="4632844" cy="914400"/>
           </a:xfrm>
           <a:prstGeom prst="rect">
             <a:avLst/>
@@ -5876,7 +6200,7 @@
             <a:r>
               <a:rPr sz="1400" b="0" i="0">
                 <a:solidFill>
-                  <a:srgbClr val="666666"/>
+                  <a:srgbClr val="26231F"/>
                 </a:solidFill>
               </a:rPr>
               <a:t>고맙습니다 · 가족 이름</a:t>
@@ -5903,34 +6227,34 @@
         <a:sysClr val="window" lastClr="FFFFFF"/>
       </a:lt1>
       <a:dk2>
-        <a:srgbClr val="11595F"/>
+        <a:srgbClr val="274649"/>
       </a:dk2>
       <a:lt2>
-        <a:srgbClr val="EEFBFC"/>
+        <a:srgbClr val="EAFBFD"/>
       </a:lt2>
       <a:accent1>
-        <a:srgbClr val="26B8C5"/>
+        <a:srgbClr val="7BE0EA"/>
       </a:accent1>
       <a:accent2>
-        <a:srgbClr val="209DB6"/>
+        <a:srgbClr val="9FC3EF"/>
       </a:accent2>
       <a:accent3>
-        <a:srgbClr val="11595F"/>
+        <a:srgbClr val="274649"/>
       </a:accent3>
       <a:accent4>
         <a:srgbClr val="D1F7FA"/>
       </a:accent4>
       <a:accent5>
-        <a:srgbClr val="23AABE"/>
+        <a:srgbClr val="8DD2EC"/>
       </a:accent5>
       <a:accent6>
-        <a:srgbClr val="709B9F"/>
+        <a:srgbClr val="7D9092"/>
       </a:accent6>
       <a:hlink>
-        <a:srgbClr val="26B8C5"/>
+        <a:srgbClr val="7BE0EA"/>
       </a:hlink>
       <a:folHlink>
-        <a:srgbClr val="11595F"/>
+        <a:srgbClr val="274649"/>
       </a:folHlink>
     </a:clrScheme>
     <a:fontScheme name="Office">
